--- a/ARC_Game_New/CORA_Simulation_Mechanics.pptx
+++ b/ARC_Game_New/CORA_Simulation_Mechanics.pptx
@@ -15,6 +15,12 @@
     <p:sldId id="263" r:id="rId14"/>
     <p:sldId id="264" r:id="rId15"/>
     <p:sldId id="265" r:id="rId16"/>
+    <p:sldId id="266" r:id="rId17"/>
+    <p:sldId id="267" r:id="rId18"/>
+    <p:sldId id="268" r:id="rId19"/>
+    <p:sldId id="269" r:id="rId20"/>
+    <p:sldId id="270" r:id="rId21"/>
+    <p:sldId id="271" r:id="rId22"/>
   </p:sldIdLst>
   <p:sldSz cx="12191695" cy="6858000" type="screen4x3"/>
   <p:notesSz cx="6858000" cy="9144000"/>
@@ -4295,6 +4301,5439 @@
                 <a:latin typeface="Calibri"/>
               </a:rPr>
               <a:t>Pays the MOST for kitchens yet ships zero food: refuses the one reliable delivery channel as ‘waste,’ then idles. The case RL must fix.</a:t>
+            </a:r>
+          </a:p>
+        </p:txBody>
+      </p:sp>
+    </p:spTree>
+  </p:cSld>
+  <p:clrMapOvr>
+    <a:masterClrMapping/>
+  </p:clrMapOvr>
+</p:sld>
+</file>
+
+<file path=ppt/slides/slide11.xml><?xml version="1.0" encoding="utf-8"?>
+<p:sld xmlns:a="http://schemas.openxmlformats.org/drawingml/2006/main" xmlns:p="http://schemas.openxmlformats.org/presentationml/2006/main" xmlns:r="http://schemas.openxmlformats.org/officeDocument/2006/relationships">
+  <p:cSld>
+    <p:spTree>
+      <p:nvGrpSpPr>
+        <p:cNvPr id="1" name=""/>
+        <p:cNvGrpSpPr/>
+        <p:nvPr/>
+      </p:nvGrpSpPr>
+      <p:grpSpPr/>
+      <p:sp>
+        <p:nvSpPr>
+          <p:cNvPr id="2" name="Rectangle 1"/>
+          <p:cNvSpPr/>
+          <p:nvPr/>
+        </p:nvSpPr>
+        <p:spPr>
+          <a:xfrm>
+            <a:off x="0" y="0"/>
+            <a:ext cx="12188952" cy="1051560"/>
+          </a:xfrm>
+          <a:prstGeom prst="rect">
+            <a:avLst/>
+          </a:prstGeom>
+          <a:solidFill>
+            <a:srgbClr val="1F3A5F"/>
+          </a:solidFill>
+          <a:ln>
+            <a:noFill/>
+          </a:ln>
+          <a:effectLst/>
+        </p:spPr>
+        <p:style>
+          <a:lnRef idx="1">
+            <a:schemeClr val="accent1"/>
+          </a:lnRef>
+          <a:fillRef idx="3">
+            <a:schemeClr val="accent1"/>
+          </a:fillRef>
+          <a:effectRef idx="2">
+            <a:schemeClr val="accent1"/>
+          </a:effectRef>
+          <a:fontRef idx="minor">
+            <a:schemeClr val="lt1"/>
+          </a:fontRef>
+        </p:style>
+        <p:txBody>
+          <a:bodyPr rtlCol="0" anchor="ctr"/>
+          <a:lstStyle/>
+          <a:p>
+            <a:pPr algn="ctr"/>
+          </a:p>
+        </p:txBody>
+      </p:sp>
+      <p:sp>
+        <p:nvSpPr>
+          <p:cNvPr id="3" name="Rectangle 2"/>
+          <p:cNvSpPr/>
+          <p:nvPr/>
+        </p:nvSpPr>
+        <p:spPr>
+          <a:xfrm>
+            <a:off x="0" y="1051560"/>
+            <a:ext cx="12188952" cy="54864"/>
+          </a:xfrm>
+          <a:prstGeom prst="rect">
+            <a:avLst/>
+          </a:prstGeom>
+          <a:solidFill>
+            <a:srgbClr val="2E75B6"/>
+          </a:solidFill>
+          <a:ln>
+            <a:noFill/>
+          </a:ln>
+          <a:effectLst/>
+        </p:spPr>
+        <p:style>
+          <a:lnRef idx="1">
+            <a:schemeClr val="accent1"/>
+          </a:lnRef>
+          <a:fillRef idx="3">
+            <a:schemeClr val="accent1"/>
+          </a:fillRef>
+          <a:effectRef idx="2">
+            <a:schemeClr val="accent1"/>
+          </a:effectRef>
+          <a:fontRef idx="minor">
+            <a:schemeClr val="lt1"/>
+          </a:fontRef>
+        </p:style>
+        <p:txBody>
+          <a:bodyPr rtlCol="0" anchor="ctr"/>
+          <a:lstStyle/>
+          <a:p>
+            <a:pPr algn="ctr"/>
+          </a:p>
+        </p:txBody>
+      </p:sp>
+      <p:sp>
+        <p:nvSpPr>
+          <p:cNvPr id="4" name="TextBox 3"/>
+          <p:cNvSpPr txBox="1"/>
+          <p:nvPr/>
+        </p:nvSpPr>
+        <p:spPr>
+          <a:xfrm>
+            <a:off x="502920" y="146304"/>
+            <a:ext cx="11247120" cy="777240"/>
+          </a:xfrm>
+          <a:prstGeom prst="rect">
+            <a:avLst/>
+          </a:prstGeom>
+          <a:noFill/>
+        </p:spPr>
+        <p:txBody>
+          <a:bodyPr wrap="square">
+            <a:spAutoFit/>
+          </a:bodyPr>
+          <a:lstStyle/>
+          <a:p>
+            <a:pPr>
+              <a:spcBef>
+                <a:spcPts val="0"/>
+              </a:spcBef>
+              <a:spcAft>
+                <a:spcPts val="300"/>
+              </a:spcAft>
+            </a:pPr>
+            <a:r>
+              <a:rPr sz="3000" b="1">
+                <a:solidFill>
+                  <a:srgbClr val="FFFFFF"/>
+                </a:solidFill>
+                <a:latin typeface="Calibri"/>
+              </a:rPr>
+              <a:t>Prompting: one source, three consumers</a:t>
+            </a:r>
+          </a:p>
+        </p:txBody>
+      </p:sp>
+      <p:sp>
+        <p:nvSpPr>
+          <p:cNvPr id="5" name="TextBox 4"/>
+          <p:cNvSpPr txBox="1"/>
+          <p:nvPr/>
+        </p:nvSpPr>
+        <p:spPr>
+          <a:xfrm>
+            <a:off x="502920" y="1152144"/>
+            <a:ext cx="11338560" cy="384048"/>
+          </a:xfrm>
+          <a:prstGeom prst="rect">
+            <a:avLst/>
+          </a:prstGeom>
+          <a:noFill/>
+        </p:spPr>
+        <p:txBody>
+          <a:bodyPr wrap="square">
+            <a:spAutoFit/>
+          </a:bodyPr>
+          <a:lstStyle/>
+          <a:p>
+            <a:pPr>
+              <a:spcBef>
+                <a:spcPts val="0"/>
+              </a:spcBef>
+              <a:spcAft>
+                <a:spcPts val="300"/>
+              </a:spcAft>
+            </a:pPr>
+            <a:r>
+              <a:rPr sz="1300" b="1">
+                <a:solidFill>
+                  <a:srgbClr val="595959"/>
+                </a:solidFill>
+                <a:latin typeface="Calibri"/>
+              </a:rPr>
+              <a:t>cora_prompts.py is the single definition of the world. Benchmark, live officers and RL all read it.</a:t>
+            </a:r>
+          </a:p>
+        </p:txBody>
+      </p:sp>
+      <p:sp>
+        <p:nvSpPr>
+          <p:cNvPr id="6" name="Rectangle 5"/>
+          <p:cNvSpPr/>
+          <p:nvPr/>
+        </p:nvSpPr>
+        <p:spPr>
+          <a:xfrm>
+            <a:off x="502920" y="1691640"/>
+            <a:ext cx="3593592" cy="1417320"/>
+          </a:xfrm>
+          <a:prstGeom prst="rect">
+            <a:avLst/>
+          </a:prstGeom>
+          <a:solidFill>
+            <a:srgbClr val="F2F2F2"/>
+          </a:solidFill>
+          <a:ln>
+            <a:noFill/>
+          </a:ln>
+          <a:effectLst/>
+        </p:spPr>
+        <p:style>
+          <a:lnRef idx="1">
+            <a:schemeClr val="accent1"/>
+          </a:lnRef>
+          <a:fillRef idx="3">
+            <a:schemeClr val="accent1"/>
+          </a:fillRef>
+          <a:effectRef idx="2">
+            <a:schemeClr val="accent1"/>
+          </a:effectRef>
+          <a:fontRef idx="minor">
+            <a:schemeClr val="lt1"/>
+          </a:fontRef>
+        </p:style>
+        <p:txBody>
+          <a:bodyPr rtlCol="0" anchor="ctr"/>
+          <a:lstStyle/>
+          <a:p>
+            <a:pPr algn="ctr"/>
+          </a:p>
+        </p:txBody>
+      </p:sp>
+      <p:sp>
+        <p:nvSpPr>
+          <p:cNvPr id="7" name="TextBox 6"/>
+          <p:cNvSpPr txBox="1"/>
+          <p:nvPr/>
+        </p:nvSpPr>
+        <p:spPr>
+          <a:xfrm>
+            <a:off x="667512" y="1801368"/>
+            <a:ext cx="3291840" cy="1234440"/>
+          </a:xfrm>
+          <a:prstGeom prst="rect">
+            <a:avLst/>
+          </a:prstGeom>
+          <a:noFill/>
+        </p:spPr>
+        <p:txBody>
+          <a:bodyPr wrap="square">
+            <a:spAutoFit/>
+          </a:bodyPr>
+          <a:lstStyle/>
+          <a:p>
+            <a:pPr>
+              <a:spcBef>
+                <a:spcPts val="0"/>
+              </a:spcBef>
+              <a:spcAft>
+                <a:spcPts val="300"/>
+              </a:spcAft>
+            </a:pPr>
+            <a:r>
+              <a:rPr sz="1400" b="1">
+                <a:solidFill>
+                  <a:srgbClr val="1F3A5F"/>
+                </a:solidFill>
+                <a:latin typeface="Calibri"/>
+              </a:rPr>
+              <a:t>BENCHMARK</a:t>
+            </a:r>
+          </a:p>
+          <a:p>
+            <a:pPr>
+              <a:spcBef>
+                <a:spcPts val="0"/>
+              </a:spcBef>
+              <a:spcAft>
+                <a:spcPts val="100"/>
+              </a:spcAft>
+            </a:pPr>
+            <a:r>
+              <a:rPr sz="1150" b="0">
+                <a:solidFill>
+                  <a:srgbClr val="222222"/>
+                </a:solidFill>
+                <a:latin typeface="Calibri"/>
+              </a:rPr>
+              <a:t>benchmark_models.py</a:t>
+            </a:r>
+          </a:p>
+          <a:p>
+            <a:pPr>
+              <a:spcBef>
+                <a:spcPts val="0"/>
+              </a:spcBef>
+              <a:spcAft>
+                <a:spcPts val="100"/>
+              </a:spcAft>
+            </a:pPr>
+            <a:r>
+              <a:rPr sz="1150" b="0">
+                <a:solidFill>
+                  <a:srgbClr val="222222"/>
+                </a:solidFill>
+                <a:latin typeface="Calibri"/>
+              </a:rPr>
+              <a:t>LLM plays Director</a:t>
+            </a:r>
+          </a:p>
+          <a:p>
+            <a:pPr>
+              <a:spcBef>
+                <a:spcPts val="0"/>
+              </a:spcBef>
+              <a:spcAft>
+                <a:spcPts val="100"/>
+              </a:spcAft>
+            </a:pPr>
+            <a:r>
+              <a:rPr sz="1150" b="0">
+                <a:solidFill>
+                  <a:srgbClr val="222222"/>
+                </a:solidFill>
+                <a:latin typeface="Calibri"/>
+              </a:rPr>
+              <a:t>typed tool_calls</a:t>
+            </a:r>
+          </a:p>
+        </p:txBody>
+      </p:sp>
+      <p:sp>
+        <p:nvSpPr>
+          <p:cNvPr id="8" name="Rectangle 7"/>
+          <p:cNvSpPr/>
+          <p:nvPr/>
+        </p:nvSpPr>
+        <p:spPr>
+          <a:xfrm>
+            <a:off x="4297680" y="1691640"/>
+            <a:ext cx="3593592" cy="1417320"/>
+          </a:xfrm>
+          <a:prstGeom prst="rect">
+            <a:avLst/>
+          </a:prstGeom>
+          <a:solidFill>
+            <a:srgbClr val="F2F2F2"/>
+          </a:solidFill>
+          <a:ln>
+            <a:noFill/>
+          </a:ln>
+          <a:effectLst/>
+        </p:spPr>
+        <p:style>
+          <a:lnRef idx="1">
+            <a:schemeClr val="accent1"/>
+          </a:lnRef>
+          <a:fillRef idx="3">
+            <a:schemeClr val="accent1"/>
+          </a:fillRef>
+          <a:effectRef idx="2">
+            <a:schemeClr val="accent1"/>
+          </a:effectRef>
+          <a:fontRef idx="minor">
+            <a:schemeClr val="lt1"/>
+          </a:fontRef>
+        </p:style>
+        <p:txBody>
+          <a:bodyPr rtlCol="0" anchor="ctr"/>
+          <a:lstStyle/>
+          <a:p>
+            <a:pPr algn="ctr"/>
+          </a:p>
+        </p:txBody>
+      </p:sp>
+      <p:sp>
+        <p:nvSpPr>
+          <p:cNvPr id="9" name="TextBox 8"/>
+          <p:cNvSpPr txBox="1"/>
+          <p:nvPr/>
+        </p:nvSpPr>
+        <p:spPr>
+          <a:xfrm>
+            <a:off x="4462272" y="1801368"/>
+            <a:ext cx="3291840" cy="1234440"/>
+          </a:xfrm>
+          <a:prstGeom prst="rect">
+            <a:avLst/>
+          </a:prstGeom>
+          <a:noFill/>
+        </p:spPr>
+        <p:txBody>
+          <a:bodyPr wrap="square">
+            <a:spAutoFit/>
+          </a:bodyPr>
+          <a:lstStyle/>
+          <a:p>
+            <a:pPr>
+              <a:spcBef>
+                <a:spcPts val="0"/>
+              </a:spcBef>
+              <a:spcAft>
+                <a:spcPts val="300"/>
+              </a:spcAft>
+            </a:pPr>
+            <a:r>
+              <a:rPr sz="1400" b="1">
+                <a:solidFill>
+                  <a:srgbClr val="1F3A5F"/>
+                </a:solidFill>
+                <a:latin typeface="Calibri"/>
+              </a:rPr>
+              <a:t>LIVE GUI</a:t>
+            </a:r>
+          </a:p>
+          <a:p>
+            <a:pPr>
+              <a:spcBef>
+                <a:spcPts val="0"/>
+              </a:spcBef>
+              <a:spcAft>
+                <a:spcPts val="100"/>
+              </a:spcAft>
+            </a:pPr>
+            <a:r>
+              <a:rPr sz="1150" b="0">
+                <a:solidFill>
+                  <a:srgbClr val="222222"/>
+                </a:solidFill>
+                <a:latin typeface="Calibri"/>
+              </a:rPr>
+              <a:t>agent_router.py</a:t>
+            </a:r>
+          </a:p>
+          <a:p>
+            <a:pPr>
+              <a:spcBef>
+                <a:spcPts val="0"/>
+              </a:spcBef>
+              <a:spcAft>
+                <a:spcPts val="100"/>
+              </a:spcAft>
+            </a:pPr>
+            <a:r>
+              <a:rPr sz="1150" b="0">
+                <a:solidFill>
+                  <a:srgbClr val="222222"/>
+                </a:solidFill>
+                <a:latin typeface="Calibri"/>
+              </a:rPr>
+              <a:t>LLM advises a human</a:t>
+            </a:r>
+          </a:p>
+          <a:p>
+            <a:pPr>
+              <a:spcBef>
+                <a:spcPts val="0"/>
+              </a:spcBef>
+              <a:spcAft>
+                <a:spcPts val="100"/>
+              </a:spcAft>
+            </a:pPr>
+            <a:r>
+              <a:rPr sz="1150" b="0">
+                <a:solidFill>
+                  <a:srgbClr val="222222"/>
+                </a:solidFill>
+                <a:latin typeface="Calibri"/>
+              </a:rPr>
+              <a:t>+ propose_choices</a:t>
+            </a:r>
+          </a:p>
+        </p:txBody>
+      </p:sp>
+      <p:sp>
+        <p:nvSpPr>
+          <p:cNvPr id="10" name="Rectangle 9"/>
+          <p:cNvSpPr/>
+          <p:nvPr/>
+        </p:nvSpPr>
+        <p:spPr>
+          <a:xfrm>
+            <a:off x="8092440" y="1691640"/>
+            <a:ext cx="3593592" cy="1417320"/>
+          </a:xfrm>
+          <a:prstGeom prst="rect">
+            <a:avLst/>
+          </a:prstGeom>
+          <a:solidFill>
+            <a:srgbClr val="F2F2F2"/>
+          </a:solidFill>
+          <a:ln>
+            <a:noFill/>
+          </a:ln>
+          <a:effectLst/>
+        </p:spPr>
+        <p:style>
+          <a:lnRef idx="1">
+            <a:schemeClr val="accent1"/>
+          </a:lnRef>
+          <a:fillRef idx="3">
+            <a:schemeClr val="accent1"/>
+          </a:fillRef>
+          <a:effectRef idx="2">
+            <a:schemeClr val="accent1"/>
+          </a:effectRef>
+          <a:fontRef idx="minor">
+            <a:schemeClr val="lt1"/>
+          </a:fontRef>
+        </p:style>
+        <p:txBody>
+          <a:bodyPr rtlCol="0" anchor="ctr"/>
+          <a:lstStyle/>
+          <a:p>
+            <a:pPr algn="ctr"/>
+          </a:p>
+        </p:txBody>
+      </p:sp>
+      <p:sp>
+        <p:nvSpPr>
+          <p:cNvPr id="11" name="TextBox 10"/>
+          <p:cNvSpPr txBox="1"/>
+          <p:nvPr/>
+        </p:nvSpPr>
+        <p:spPr>
+          <a:xfrm>
+            <a:off x="8257031" y="1801368"/>
+            <a:ext cx="3291840" cy="1234440"/>
+          </a:xfrm>
+          <a:prstGeom prst="rect">
+            <a:avLst/>
+          </a:prstGeom>
+          <a:noFill/>
+        </p:spPr>
+        <p:txBody>
+          <a:bodyPr wrap="square">
+            <a:spAutoFit/>
+          </a:bodyPr>
+          <a:lstStyle/>
+          <a:p>
+            <a:pPr>
+              <a:spcBef>
+                <a:spcPts val="0"/>
+              </a:spcBef>
+              <a:spcAft>
+                <a:spcPts val="300"/>
+              </a:spcAft>
+            </a:pPr>
+            <a:r>
+              <a:rPr sz="1400" b="1">
+                <a:solidFill>
+                  <a:srgbClr val="1F3A5F"/>
+                </a:solidFill>
+                <a:latin typeface="Calibri"/>
+              </a:rPr>
+              <a:t>RL / veRL</a:t>
+            </a:r>
+          </a:p>
+          <a:p>
+            <a:pPr>
+              <a:spcBef>
+                <a:spcPts val="0"/>
+              </a:spcBef>
+              <a:spcAft>
+                <a:spcPts val="100"/>
+              </a:spcAft>
+            </a:pPr>
+            <a:r>
+              <a:rPr sz="1150" b="0">
+                <a:solidFill>
+                  <a:srgbClr val="222222"/>
+                </a:solidFill>
+                <a:latin typeface="Calibri"/>
+              </a:rPr>
+              <a:t>Verlog arc_game env</a:t>
+            </a:r>
+          </a:p>
+          <a:p>
+            <a:pPr>
+              <a:spcBef>
+                <a:spcPts val="0"/>
+              </a:spcBef>
+              <a:spcAft>
+                <a:spcPts val="100"/>
+              </a:spcAft>
+            </a:pPr>
+            <a:r>
+              <a:rPr sz="1150" b="0">
+                <a:solidFill>
+                  <a:srgbClr val="222222"/>
+                </a:solidFill>
+                <a:latin typeface="Calibri"/>
+              </a:rPr>
+              <a:t>policy under training</a:t>
+            </a:r>
+          </a:p>
+          <a:p>
+            <a:pPr>
+              <a:spcBef>
+                <a:spcPts val="0"/>
+              </a:spcBef>
+              <a:spcAft>
+                <a:spcPts val="100"/>
+              </a:spcAft>
+            </a:pPr>
+            <a:r>
+              <a:rPr sz="1150" b="0">
+                <a:solidFill>
+                  <a:srgbClr val="222222"/>
+                </a:solidFill>
+                <a:latin typeface="Calibri"/>
+              </a:rPr>
+              <a:t>hermes tool_call</a:t>
+            </a:r>
+          </a:p>
+        </p:txBody>
+      </p:sp>
+      <p:sp>
+        <p:nvSpPr>
+          <p:cNvPr id="12" name="Rectangle 11"/>
+          <p:cNvSpPr/>
+          <p:nvPr/>
+        </p:nvSpPr>
+        <p:spPr>
+          <a:xfrm>
+            <a:off x="502920" y="3310128"/>
+            <a:ext cx="11183112" cy="932688"/>
+          </a:xfrm>
+          <a:prstGeom prst="rect">
+            <a:avLst/>
+          </a:prstGeom>
+          <a:solidFill>
+            <a:srgbClr val="E8EFE0"/>
+          </a:solidFill>
+          <a:ln>
+            <a:noFill/>
+          </a:ln>
+          <a:effectLst/>
+        </p:spPr>
+        <p:style>
+          <a:lnRef idx="1">
+            <a:schemeClr val="accent1"/>
+          </a:lnRef>
+          <a:fillRef idx="3">
+            <a:schemeClr val="accent1"/>
+          </a:fillRef>
+          <a:effectRef idx="2">
+            <a:schemeClr val="accent1"/>
+          </a:effectRef>
+          <a:fontRef idx="minor">
+            <a:schemeClr val="lt1"/>
+          </a:fontRef>
+        </p:style>
+        <p:txBody>
+          <a:bodyPr rtlCol="0" anchor="ctr"/>
+          <a:lstStyle/>
+          <a:p>
+            <a:pPr algn="ctr"/>
+          </a:p>
+        </p:txBody>
+      </p:sp>
+      <p:sp>
+        <p:nvSpPr>
+          <p:cNvPr id="13" name="TextBox 12"/>
+          <p:cNvSpPr txBox="1"/>
+          <p:nvPr/>
+        </p:nvSpPr>
+        <p:spPr>
+          <a:xfrm>
+            <a:off x="713232" y="3419856"/>
+            <a:ext cx="10789920" cy="777240"/>
+          </a:xfrm>
+          <a:prstGeom prst="rect">
+            <a:avLst/>
+          </a:prstGeom>
+          <a:noFill/>
+        </p:spPr>
+        <p:txBody>
+          <a:bodyPr wrap="square">
+            <a:spAutoFit/>
+          </a:bodyPr>
+          <a:lstStyle/>
+          <a:p>
+            <a:pPr>
+              <a:spcBef>
+                <a:spcPts val="0"/>
+              </a:spcBef>
+              <a:spcAft>
+                <a:spcPts val="300"/>
+              </a:spcAft>
+            </a:pPr>
+            <a:r>
+              <a:rPr sz="1300" b="1">
+                <a:solidFill>
+                  <a:srgbClr val="548235"/>
+                </a:solidFill>
+                <a:latin typeface="Calibri"/>
+              </a:rPr>
+              <a:t>shared, byte-identical:  </a:t>
+            </a:r>
+            <a:r>
+              <a:rPr sz="1300" b="0">
+                <a:solidFill>
+                  <a:srgbClr val="222222"/>
+                </a:solidFill>
+                <a:latin typeface="Calibri"/>
+              </a:rPr>
+              <a:t>cora_prompts (mechanics + action rules)   ·   obs_encoder (what the state looks like)   ·   cora_tools (the 7 typed tools)   ·   cmd_parser (execution)</a:t>
+            </a:r>
+          </a:p>
+          <a:p>
+            <a:pPr>
+              <a:spcBef>
+                <a:spcPts val="300"/>
+              </a:spcBef>
+              <a:spcAft>
+                <a:spcPts val="300"/>
+              </a:spcAft>
+            </a:pPr>
+            <a:r>
+              <a:rPr sz="1300" b="1">
+                <a:solidFill>
+                  <a:srgbClr val="BF8F00"/>
+                </a:solidFill>
+                <a:latin typeface="Calibri"/>
+              </a:rPr>
+              <a:t>differs by design:  </a:t>
+            </a:r>
+            <a:r>
+              <a:rPr sz="1300" b="0">
+                <a:solidFill>
+                  <a:srgbClr val="222222"/>
+                </a:solidFill>
+                <a:latin typeface="Calibri"/>
+              </a:rPr>
+              <a:t>wire_format — 'typed' for OpenAI-style tool_calls, 'hermes' for the &lt;tool_call&gt; blocks veRL renders. One paragraph, nothing else.</a:t>
+            </a:r>
+          </a:p>
+        </p:txBody>
+      </p:sp>
+      <p:sp>
+        <p:nvSpPr>
+          <p:cNvPr id="14" name="Rectangle 13"/>
+          <p:cNvSpPr/>
+          <p:nvPr/>
+        </p:nvSpPr>
+        <p:spPr>
+          <a:xfrm>
+            <a:off x="502920" y="4443984"/>
+            <a:ext cx="11183112" cy="1417320"/>
+          </a:xfrm>
+          <a:prstGeom prst="rect">
+            <a:avLst/>
+          </a:prstGeom>
+          <a:solidFill>
+            <a:srgbClr val="1F3A5F"/>
+          </a:solidFill>
+          <a:ln>
+            <a:noFill/>
+          </a:ln>
+          <a:effectLst/>
+        </p:spPr>
+        <p:style>
+          <a:lnRef idx="1">
+            <a:schemeClr val="accent1"/>
+          </a:lnRef>
+          <a:fillRef idx="3">
+            <a:schemeClr val="accent1"/>
+          </a:fillRef>
+          <a:effectRef idx="2">
+            <a:schemeClr val="accent1"/>
+          </a:effectRef>
+          <a:fontRef idx="minor">
+            <a:schemeClr val="lt1"/>
+          </a:fontRef>
+        </p:style>
+        <p:txBody>
+          <a:bodyPr rtlCol="0" anchor="ctr"/>
+          <a:lstStyle/>
+          <a:p>
+            <a:pPr algn="ctr"/>
+          </a:p>
+        </p:txBody>
+      </p:sp>
+      <p:sp>
+        <p:nvSpPr>
+          <p:cNvPr id="15" name="TextBox 14"/>
+          <p:cNvSpPr txBox="1"/>
+          <p:nvPr/>
+        </p:nvSpPr>
+        <p:spPr>
+          <a:xfrm>
+            <a:off x="658368" y="4553712"/>
+            <a:ext cx="10872216" cy="1197864"/>
+          </a:xfrm>
+          <a:prstGeom prst="rect">
+            <a:avLst/>
+          </a:prstGeom>
+          <a:noFill/>
+        </p:spPr>
+        <p:txBody>
+          <a:bodyPr wrap="square">
+            <a:spAutoFit/>
+          </a:bodyPr>
+          <a:lstStyle/>
+          <a:p>
+            <a:pPr>
+              <a:spcBef>
+                <a:spcPts val="0"/>
+              </a:spcBef>
+              <a:spcAft>
+                <a:spcPts val="100"/>
+              </a:spcAft>
+            </a:pPr>
+            <a:r>
+              <a:rPr sz="1050" b="0">
+                <a:solidFill>
+                  <a:srgbClr val="8ED08E"/>
+                </a:solidFill>
+                <a:latin typeface="Consolas"/>
+              </a:rPr>
+              <a:t>tool_system_prompt(variant='minimal', wire_format='typed')    # benchmark</a:t>
+            </a:r>
+          </a:p>
+          <a:p>
+            <a:pPr>
+              <a:spcBef>
+                <a:spcPts val="0"/>
+              </a:spcBef>
+              <a:spcAft>
+                <a:spcPts val="100"/>
+              </a:spcAft>
+            </a:pPr>
+            <a:r>
+              <a:rPr sz="1050" b="0">
+                <a:solidFill>
+                  <a:srgbClr val="8ED08E"/>
+                </a:solidFill>
+                <a:latin typeface="Consolas"/>
+              </a:rPr>
+              <a:t>tool_system_prompt(variant='minimal', wire_format='hermes')   # RL, via ARC_ACTION_MODE=tool_calls</a:t>
+            </a:r>
+          </a:p>
+          <a:p>
+            <a:pPr>
+              <a:spcBef>
+                <a:spcPts val="0"/>
+              </a:spcBef>
+              <a:spcAft>
+                <a:spcPts val="100"/>
+              </a:spcAft>
+            </a:pPr>
+            <a:r>
+              <a:rPr sz="1050" b="0">
+                <a:solidFill>
+                  <a:srgbClr val="8ED08E"/>
+                </a:solidFill>
+                <a:latin typeface="Consolas"/>
+              </a:rPr>
+              <a:t/>
+            </a:r>
+          </a:p>
+          <a:p>
+            <a:pPr>
+              <a:spcBef>
+                <a:spcPts val="0"/>
+              </a:spcBef>
+              <a:spcAft>
+                <a:spcPts val="100"/>
+              </a:spcAft>
+            </a:pPr>
+            <a:r>
+              <a:rPr sz="1050" b="0">
+                <a:solidFill>
+                  <a:srgbClr val="FFFFFF"/>
+                </a:solidFill>
+                <a:latin typeface="Consolas"/>
+              </a:rPr>
+              <a:t>verified: mechanics preamble identical  ·  rule body identical  ·  only the opening paragraph swaps</a:t>
+            </a:r>
+          </a:p>
+        </p:txBody>
+      </p:sp>
+      <p:sp>
+        <p:nvSpPr>
+          <p:cNvPr id="16" name="TextBox 15"/>
+          <p:cNvSpPr txBox="1"/>
+          <p:nvPr/>
+        </p:nvSpPr>
+        <p:spPr>
+          <a:xfrm>
+            <a:off x="502920" y="5989320"/>
+            <a:ext cx="11201400" cy="566928"/>
+          </a:xfrm>
+          <a:prstGeom prst="rect">
+            <a:avLst/>
+          </a:prstGeom>
+          <a:noFill/>
+        </p:spPr>
+        <p:txBody>
+          <a:bodyPr wrap="square">
+            <a:spAutoFit/>
+          </a:bodyPr>
+          <a:lstStyle/>
+          <a:p>
+            <a:pPr>
+              <a:spcBef>
+                <a:spcPts val="0"/>
+              </a:spcBef>
+              <a:spcAft>
+                <a:spcPts val="300"/>
+              </a:spcAft>
+            </a:pPr>
+            <a:r>
+              <a:rPr sz="1300" b="1">
+                <a:solidFill>
+                  <a:srgbClr val="548235"/>
+                </a:solidFill>
+                <a:latin typeface="Calibri"/>
+              </a:rPr>
+              <a:t>Why it matters:  </a:t>
+            </a:r>
+            <a:r>
+              <a:rPr sz="1300" b="0">
+                <a:solidFill>
+                  <a:srgbClr val="222222"/>
+                </a:solidFill>
+                <a:latin typeface="Calibri"/>
+              </a:rPr>
+              <a:t>the RL wing previously kept its own copy and spliced it in by string-matching a header line — it drifted, and an edit to that line would have crashed every training job.</a:t>
+            </a:r>
+          </a:p>
+        </p:txBody>
+      </p:sp>
+    </p:spTree>
+  </p:cSld>
+  <p:clrMapOvr>
+    <a:masterClrMapping/>
+  </p:clrMapOvr>
+</p:sld>
+</file>
+
+<file path=ppt/slides/slide12.xml><?xml version="1.0" encoding="utf-8"?>
+<p:sld xmlns:a="http://schemas.openxmlformats.org/drawingml/2006/main" xmlns:p="http://schemas.openxmlformats.org/presentationml/2006/main" xmlns:r="http://schemas.openxmlformats.org/officeDocument/2006/relationships">
+  <p:cSld>
+    <p:spTree>
+      <p:nvGrpSpPr>
+        <p:cNvPr id="1" name=""/>
+        <p:cNvGrpSpPr/>
+        <p:nvPr/>
+      </p:nvGrpSpPr>
+      <p:grpSpPr/>
+      <p:sp>
+        <p:nvSpPr>
+          <p:cNvPr id="2" name="Rectangle 1"/>
+          <p:cNvSpPr/>
+          <p:nvPr/>
+        </p:nvSpPr>
+        <p:spPr>
+          <a:xfrm>
+            <a:off x="0" y="0"/>
+            <a:ext cx="12188952" cy="1051560"/>
+          </a:xfrm>
+          <a:prstGeom prst="rect">
+            <a:avLst/>
+          </a:prstGeom>
+          <a:solidFill>
+            <a:srgbClr val="1F3A5F"/>
+          </a:solidFill>
+          <a:ln>
+            <a:noFill/>
+          </a:ln>
+          <a:effectLst/>
+        </p:spPr>
+        <p:style>
+          <a:lnRef idx="1">
+            <a:schemeClr val="accent1"/>
+          </a:lnRef>
+          <a:fillRef idx="3">
+            <a:schemeClr val="accent1"/>
+          </a:fillRef>
+          <a:effectRef idx="2">
+            <a:schemeClr val="accent1"/>
+          </a:effectRef>
+          <a:fontRef idx="minor">
+            <a:schemeClr val="lt1"/>
+          </a:fontRef>
+        </p:style>
+        <p:txBody>
+          <a:bodyPr rtlCol="0" anchor="ctr"/>
+          <a:lstStyle/>
+          <a:p>
+            <a:pPr algn="ctr"/>
+          </a:p>
+        </p:txBody>
+      </p:sp>
+      <p:sp>
+        <p:nvSpPr>
+          <p:cNvPr id="3" name="Rectangle 2"/>
+          <p:cNvSpPr/>
+          <p:nvPr/>
+        </p:nvSpPr>
+        <p:spPr>
+          <a:xfrm>
+            <a:off x="0" y="1051560"/>
+            <a:ext cx="12188952" cy="54864"/>
+          </a:xfrm>
+          <a:prstGeom prst="rect">
+            <a:avLst/>
+          </a:prstGeom>
+          <a:solidFill>
+            <a:srgbClr val="2E75B6"/>
+          </a:solidFill>
+          <a:ln>
+            <a:noFill/>
+          </a:ln>
+          <a:effectLst/>
+        </p:spPr>
+        <p:style>
+          <a:lnRef idx="1">
+            <a:schemeClr val="accent1"/>
+          </a:lnRef>
+          <a:fillRef idx="3">
+            <a:schemeClr val="accent1"/>
+          </a:fillRef>
+          <a:effectRef idx="2">
+            <a:schemeClr val="accent1"/>
+          </a:effectRef>
+          <a:fontRef idx="minor">
+            <a:schemeClr val="lt1"/>
+          </a:fontRef>
+        </p:style>
+        <p:txBody>
+          <a:bodyPr rtlCol="0" anchor="ctr"/>
+          <a:lstStyle/>
+          <a:p>
+            <a:pPr algn="ctr"/>
+          </a:p>
+        </p:txBody>
+      </p:sp>
+      <p:sp>
+        <p:nvSpPr>
+          <p:cNvPr id="4" name="TextBox 3"/>
+          <p:cNvSpPr txBox="1"/>
+          <p:nvPr/>
+        </p:nvSpPr>
+        <p:spPr>
+          <a:xfrm>
+            <a:off x="502920" y="146304"/>
+            <a:ext cx="11247120" cy="777240"/>
+          </a:xfrm>
+          <a:prstGeom prst="rect">
+            <a:avLst/>
+          </a:prstGeom>
+          <a:noFill/>
+        </p:spPr>
+        <p:txBody>
+          <a:bodyPr wrap="square">
+            <a:spAutoFit/>
+          </a:bodyPr>
+          <a:lstStyle/>
+          <a:p>
+            <a:pPr>
+              <a:spcBef>
+                <a:spcPts val="0"/>
+              </a:spcBef>
+              <a:spcAft>
+                <a:spcPts val="300"/>
+              </a:spcAft>
+            </a:pPr>
+            <a:r>
+              <a:rPr sz="3000" b="1">
+                <a:solidFill>
+                  <a:srgbClr val="FFFFFF"/>
+                </a:solidFill>
+                <a:latin typeface="Calibri"/>
+              </a:rPr>
+              <a:t>What the model is actually told</a:t>
+            </a:r>
+          </a:p>
+        </p:txBody>
+      </p:sp>
+      <p:sp>
+        <p:nvSpPr>
+          <p:cNvPr id="5" name="TextBox 4"/>
+          <p:cNvSpPr txBox="1"/>
+          <p:nvPr/>
+        </p:nvSpPr>
+        <p:spPr>
+          <a:xfrm>
+            <a:off x="502920" y="1152144"/>
+            <a:ext cx="11338560" cy="384048"/>
+          </a:xfrm>
+          <a:prstGeom prst="rect">
+            <a:avLst/>
+          </a:prstGeom>
+          <a:noFill/>
+        </p:spPr>
+        <p:txBody>
+          <a:bodyPr wrap="square">
+            <a:spAutoFit/>
+          </a:bodyPr>
+          <a:lstStyle/>
+          <a:p>
+            <a:pPr>
+              <a:spcBef>
+                <a:spcPts val="0"/>
+              </a:spcBef>
+              <a:spcAft>
+                <a:spcPts val="300"/>
+              </a:spcAft>
+            </a:pPr>
+            <a:r>
+              <a:rPr sz="1300" b="1">
+                <a:solidFill>
+                  <a:srgbClr val="595959"/>
+                </a:solidFill>
+                <a:latin typeface="Calibri"/>
+              </a:rPr>
+              <a:t>The system prompt is ~3.8k characters in five sections. Mechanics only — no strategy is supplied.</a:t>
+            </a:r>
+          </a:p>
+        </p:txBody>
+      </p:sp>
+      <p:sp>
+        <p:nvSpPr>
+          <p:cNvPr id="6" name="Rectangle 5"/>
+          <p:cNvSpPr/>
+          <p:nvPr/>
+        </p:nvSpPr>
+        <p:spPr>
+          <a:xfrm>
+            <a:off x="502920" y="1645920"/>
+            <a:ext cx="2331720" cy="804672"/>
+          </a:xfrm>
+          <a:prstGeom prst="rect">
+            <a:avLst/>
+          </a:prstGeom>
+          <a:solidFill>
+            <a:srgbClr val="F2F2F2"/>
+          </a:solidFill>
+          <a:ln>
+            <a:noFill/>
+          </a:ln>
+          <a:effectLst/>
+        </p:spPr>
+        <p:style>
+          <a:lnRef idx="1">
+            <a:schemeClr val="accent1"/>
+          </a:lnRef>
+          <a:fillRef idx="3">
+            <a:schemeClr val="accent1"/>
+          </a:fillRef>
+          <a:effectRef idx="2">
+            <a:schemeClr val="accent1"/>
+          </a:effectRef>
+          <a:fontRef idx="minor">
+            <a:schemeClr val="lt1"/>
+          </a:fontRef>
+        </p:style>
+        <p:txBody>
+          <a:bodyPr rtlCol="0" anchor="ctr"/>
+          <a:lstStyle/>
+          <a:p>
+            <a:pPr algn="ctr"/>
+          </a:p>
+        </p:txBody>
+      </p:sp>
+      <p:sp>
+        <p:nvSpPr>
+          <p:cNvPr id="7" name="TextBox 6"/>
+          <p:cNvSpPr txBox="1"/>
+          <p:nvPr/>
+        </p:nvSpPr>
+        <p:spPr>
+          <a:xfrm>
+            <a:off x="640080" y="1828800"/>
+            <a:ext cx="2103120" cy="502920"/>
+          </a:xfrm>
+          <a:prstGeom prst="rect">
+            <a:avLst/>
+          </a:prstGeom>
+          <a:noFill/>
+        </p:spPr>
+        <p:txBody>
+          <a:bodyPr wrap="square">
+            <a:spAutoFit/>
+          </a:bodyPr>
+          <a:lstStyle/>
+          <a:p>
+            <a:pPr>
+              <a:spcBef>
+                <a:spcPts val="0"/>
+              </a:spcBef>
+              <a:spcAft>
+                <a:spcPts val="300"/>
+              </a:spcAft>
+            </a:pPr>
+            <a:r>
+              <a:rPr sz="1250" b="1">
+                <a:solidFill>
+                  <a:srgbClr val="1F3A5F"/>
+                </a:solidFill>
+                <a:latin typeface="Calibri"/>
+              </a:rPr>
+              <a:t>1  ROLE</a:t>
+            </a:r>
+          </a:p>
+        </p:txBody>
+      </p:sp>
+      <p:sp>
+        <p:nvSpPr>
+          <p:cNvPr id="8" name="TextBox 7"/>
+          <p:cNvSpPr txBox="1"/>
+          <p:nvPr/>
+        </p:nvSpPr>
+        <p:spPr>
+          <a:xfrm>
+            <a:off x="3017520" y="1700784"/>
+            <a:ext cx="8641080" cy="786384"/>
+          </a:xfrm>
+          <a:prstGeom prst="rect">
+            <a:avLst/>
+          </a:prstGeom>
+          <a:noFill/>
+        </p:spPr>
+        <p:txBody>
+          <a:bodyPr wrap="square">
+            <a:spAutoFit/>
+          </a:bodyPr>
+          <a:lstStyle/>
+          <a:p>
+            <a:pPr>
+              <a:spcBef>
+                <a:spcPts val="0"/>
+              </a:spcBef>
+              <a:spcAft>
+                <a:spcPts val="300"/>
+              </a:spcAft>
+            </a:pPr>
+            <a:r>
+              <a:rPr sz="1200" b="0">
+                <a:solidFill>
+                  <a:srgbClr val="222222"/>
+                </a:solidFill>
+                <a:latin typeface="Calibri"/>
+              </a:rPr>
+              <a:t>"You are the director in a turn-based disaster-response resource game."</a:t>
+            </a:r>
+          </a:p>
+        </p:txBody>
+      </p:sp>
+      <p:sp>
+        <p:nvSpPr>
+          <p:cNvPr id="9" name="Rectangle 8"/>
+          <p:cNvSpPr/>
+          <p:nvPr/>
+        </p:nvSpPr>
+        <p:spPr>
+          <a:xfrm>
+            <a:off x="502920" y="2523744"/>
+            <a:ext cx="2331720" cy="804672"/>
+          </a:xfrm>
+          <a:prstGeom prst="rect">
+            <a:avLst/>
+          </a:prstGeom>
+          <a:solidFill>
+            <a:srgbClr val="F2F2F2"/>
+          </a:solidFill>
+          <a:ln>
+            <a:noFill/>
+          </a:ln>
+          <a:effectLst/>
+        </p:spPr>
+        <p:style>
+          <a:lnRef idx="1">
+            <a:schemeClr val="accent1"/>
+          </a:lnRef>
+          <a:fillRef idx="3">
+            <a:schemeClr val="accent1"/>
+          </a:fillRef>
+          <a:effectRef idx="2">
+            <a:schemeClr val="accent1"/>
+          </a:effectRef>
+          <a:fontRef idx="minor">
+            <a:schemeClr val="lt1"/>
+          </a:fontRef>
+        </p:style>
+        <p:txBody>
+          <a:bodyPr rtlCol="0" anchor="ctr"/>
+          <a:lstStyle/>
+          <a:p>
+            <a:pPr algn="ctr"/>
+          </a:p>
+        </p:txBody>
+      </p:sp>
+      <p:sp>
+        <p:nvSpPr>
+          <p:cNvPr id="10" name="TextBox 9"/>
+          <p:cNvSpPr txBox="1"/>
+          <p:nvPr/>
+        </p:nvSpPr>
+        <p:spPr>
+          <a:xfrm>
+            <a:off x="640080" y="2706624"/>
+            <a:ext cx="2103120" cy="502920"/>
+          </a:xfrm>
+          <a:prstGeom prst="rect">
+            <a:avLst/>
+          </a:prstGeom>
+          <a:noFill/>
+        </p:spPr>
+        <p:txBody>
+          <a:bodyPr wrap="square">
+            <a:spAutoFit/>
+          </a:bodyPr>
+          <a:lstStyle/>
+          <a:p>
+            <a:pPr>
+              <a:spcBef>
+                <a:spcPts val="0"/>
+              </a:spcBef>
+              <a:spcAft>
+                <a:spcPts val="300"/>
+              </a:spcAft>
+            </a:pPr>
+            <a:r>
+              <a:rPr sz="1250" b="1">
+                <a:solidFill>
+                  <a:srgbClr val="1F3A5F"/>
+                </a:solidFill>
+                <a:latin typeface="Calibri"/>
+              </a:rPr>
+              <a:t>2  OBJECTIVE</a:t>
+            </a:r>
+          </a:p>
+        </p:txBody>
+      </p:sp>
+      <p:sp>
+        <p:nvSpPr>
+          <p:cNvPr id="11" name="TextBox 10"/>
+          <p:cNvSpPr txBox="1"/>
+          <p:nvPr/>
+        </p:nvSpPr>
+        <p:spPr>
+          <a:xfrm>
+            <a:off x="3017520" y="2578608"/>
+            <a:ext cx="8641080" cy="786384"/>
+          </a:xfrm>
+          <a:prstGeom prst="rect">
+            <a:avLst/>
+          </a:prstGeom>
+          <a:noFill/>
+        </p:spPr>
+        <p:txBody>
+          <a:bodyPr wrap="square">
+            <a:spAutoFit/>
+          </a:bodyPr>
+          <a:lstStyle/>
+          <a:p>
+            <a:pPr>
+              <a:spcBef>
+                <a:spcPts val="0"/>
+              </a:spcBef>
+              <a:spcAft>
+                <a:spcPts val="300"/>
+              </a:spcAft>
+            </a:pPr>
+            <a:r>
+              <a:rPr sz="1200" b="0">
+                <a:solidFill>
+                  <a:srgbClr val="222222"/>
+                </a:solidFill>
+                <a:latin typeface="Calibri"/>
+              </a:rPr>
+              <a:t>Maximise cumulative score over the WHOLE game. Rewards meeting food / lodging / casework; subtracts cost-inefficiency. Budget is finite and may go negative.</a:t>
+            </a:r>
+          </a:p>
+        </p:txBody>
+      </p:sp>
+      <p:sp>
+        <p:nvSpPr>
+          <p:cNvPr id="12" name="Rectangle 11"/>
+          <p:cNvSpPr/>
+          <p:nvPr/>
+        </p:nvSpPr>
+        <p:spPr>
+          <a:xfrm>
+            <a:off x="502920" y="3401568"/>
+            <a:ext cx="2331720" cy="804672"/>
+          </a:xfrm>
+          <a:prstGeom prst="rect">
+            <a:avLst/>
+          </a:prstGeom>
+          <a:solidFill>
+            <a:srgbClr val="F2F2F2"/>
+          </a:solidFill>
+          <a:ln>
+            <a:noFill/>
+          </a:ln>
+          <a:effectLst/>
+        </p:spPr>
+        <p:style>
+          <a:lnRef idx="1">
+            <a:schemeClr val="accent1"/>
+          </a:lnRef>
+          <a:fillRef idx="3">
+            <a:schemeClr val="accent1"/>
+          </a:fillRef>
+          <a:effectRef idx="2">
+            <a:schemeClr val="accent1"/>
+          </a:effectRef>
+          <a:fontRef idx="minor">
+            <a:schemeClr val="lt1"/>
+          </a:fontRef>
+        </p:style>
+        <p:txBody>
+          <a:bodyPr rtlCol="0" anchor="ctr"/>
+          <a:lstStyle/>
+          <a:p>
+            <a:pPr algn="ctr"/>
+          </a:p>
+        </p:txBody>
+      </p:sp>
+      <p:sp>
+        <p:nvSpPr>
+          <p:cNvPr id="13" name="TextBox 12"/>
+          <p:cNvSpPr txBox="1"/>
+          <p:nvPr/>
+        </p:nvSpPr>
+        <p:spPr>
+          <a:xfrm>
+            <a:off x="640080" y="3584448"/>
+            <a:ext cx="2103120" cy="502920"/>
+          </a:xfrm>
+          <a:prstGeom prst="rect">
+            <a:avLst/>
+          </a:prstGeom>
+          <a:noFill/>
+        </p:spPr>
+        <p:txBody>
+          <a:bodyPr wrap="square">
+            <a:spAutoFit/>
+          </a:bodyPr>
+          <a:lstStyle/>
+          <a:p>
+            <a:pPr>
+              <a:spcBef>
+                <a:spcPts val="0"/>
+              </a:spcBef>
+              <a:spcAft>
+                <a:spcPts val="300"/>
+              </a:spcAft>
+            </a:pPr>
+            <a:r>
+              <a:rPr sz="1250" b="1">
+                <a:solidFill>
+                  <a:srgbClr val="1F3A5F"/>
+                </a:solidFill>
+                <a:latin typeface="Calibri"/>
+              </a:rPr>
+              <a:t>3  ENTITIES &amp; RULES</a:t>
+            </a:r>
+          </a:p>
+        </p:txBody>
+      </p:sp>
+      <p:sp>
+        <p:nvSpPr>
+          <p:cNvPr id="14" name="TextBox 13"/>
+          <p:cNvSpPr txBox="1"/>
+          <p:nvPr/>
+        </p:nvSpPr>
+        <p:spPr>
+          <a:xfrm>
+            <a:off x="3017520" y="3456432"/>
+            <a:ext cx="8641080" cy="786384"/>
+          </a:xfrm>
+          <a:prstGeom prst="rect">
+            <a:avLst/>
+          </a:prstGeom>
+          <a:noFill/>
+        </p:spPr>
+        <p:txBody>
+          <a:bodyPr wrap="square">
+            <a:spAutoFit/>
+          </a:bodyPr>
+          <a:lstStyle/>
+          <a:p>
+            <a:pPr>
+              <a:spcBef>
+                <a:spcPts val="0"/>
+              </a:spcBef>
+              <a:spcAft>
+                <a:spcPts val="300"/>
+              </a:spcAft>
+            </a:pPr>
+            <a:r>
+              <a:rPr sz="1200" b="0">
+                <a:solidFill>
+                  <a:srgbClr val="222222"/>
+                </a:solidFill>
+                <a:latin typeface="Calibri"/>
+              </a:rPr>
+              <a:t>Task choices and expiry · Shelters vs the prebuilt Motel · casework preconditions · UnderConstruction → NeedWorker → InUse · worker types and workforce value.</a:t>
+            </a:r>
+          </a:p>
+        </p:txBody>
+      </p:sp>
+      <p:sp>
+        <p:nvSpPr>
+          <p:cNvPr id="15" name="Rectangle 14"/>
+          <p:cNvSpPr/>
+          <p:nvPr/>
+        </p:nvSpPr>
+        <p:spPr>
+          <a:xfrm>
+            <a:off x="502920" y="4279392"/>
+            <a:ext cx="2331720" cy="804672"/>
+          </a:xfrm>
+          <a:prstGeom prst="rect">
+            <a:avLst/>
+          </a:prstGeom>
+          <a:solidFill>
+            <a:srgbClr val="F2F2F2"/>
+          </a:solidFill>
+          <a:ln>
+            <a:noFill/>
+          </a:ln>
+          <a:effectLst/>
+        </p:spPr>
+        <p:style>
+          <a:lnRef idx="1">
+            <a:schemeClr val="accent1"/>
+          </a:lnRef>
+          <a:fillRef idx="3">
+            <a:schemeClr val="accent1"/>
+          </a:fillRef>
+          <a:effectRef idx="2">
+            <a:schemeClr val="accent1"/>
+          </a:effectRef>
+          <a:fontRef idx="minor">
+            <a:schemeClr val="lt1"/>
+          </a:fontRef>
+        </p:style>
+        <p:txBody>
+          <a:bodyPr rtlCol="0" anchor="ctr"/>
+          <a:lstStyle/>
+          <a:p>
+            <a:pPr algn="ctr"/>
+          </a:p>
+        </p:txBody>
+      </p:sp>
+      <p:sp>
+        <p:nvSpPr>
+          <p:cNvPr id="16" name="TextBox 15"/>
+          <p:cNvSpPr txBox="1"/>
+          <p:nvPr/>
+        </p:nvSpPr>
+        <p:spPr>
+          <a:xfrm>
+            <a:off x="640080" y="4462272"/>
+            <a:ext cx="2103120" cy="502920"/>
+          </a:xfrm>
+          <a:prstGeom prst="rect">
+            <a:avLst/>
+          </a:prstGeom>
+          <a:noFill/>
+        </p:spPr>
+        <p:txBody>
+          <a:bodyPr wrap="square">
+            <a:spAutoFit/>
+          </a:bodyPr>
+          <a:lstStyle/>
+          <a:p>
+            <a:pPr>
+              <a:spcBef>
+                <a:spcPts val="0"/>
+              </a:spcBef>
+              <a:spcAft>
+                <a:spcPts val="300"/>
+              </a:spcAft>
+            </a:pPr>
+            <a:r>
+              <a:rPr sz="1250" b="1">
+                <a:solidFill>
+                  <a:srgbClr val="1F3A5F"/>
+                </a:solidFill>
+                <a:latin typeface="Calibri"/>
+              </a:rPr>
+              <a:t>4  HOW TO ACT</a:t>
+            </a:r>
+          </a:p>
+        </p:txBody>
+      </p:sp>
+      <p:sp>
+        <p:nvSpPr>
+          <p:cNvPr id="17" name="TextBox 16"/>
+          <p:cNvSpPr txBox="1"/>
+          <p:nvPr/>
+        </p:nvSpPr>
+        <p:spPr>
+          <a:xfrm>
+            <a:off x="3017520" y="4334255"/>
+            <a:ext cx="8641080" cy="786384"/>
+          </a:xfrm>
+          <a:prstGeom prst="rect">
+            <a:avLst/>
+          </a:prstGeom>
+          <a:noFill/>
+        </p:spPr>
+        <p:txBody>
+          <a:bodyPr wrap="square">
+            <a:spAutoFit/>
+          </a:bodyPr>
+          <a:lstStyle/>
+          <a:p>
+            <a:pPr>
+              <a:spcBef>
+                <a:spcPts val="0"/>
+              </a:spcBef>
+              <a:spcAft>
+                <a:spcPts val="300"/>
+              </a:spcAft>
+            </a:pPr>
+            <a:r>
+              <a:rPr sz="1200" b="0">
+                <a:solidFill>
+                  <a:srgbClr val="222222"/>
+                </a:solidFill>
+                <a:latin typeface="Calibri"/>
+              </a:rPr>
+              <a:t>The 7 tools · fixed execution order · staff only what is in needStaff · stable task tokens · negative budget allowed · failures are honest signal · doing nothing is a valid turn.</a:t>
+            </a:r>
+          </a:p>
+        </p:txBody>
+      </p:sp>
+      <p:sp>
+        <p:nvSpPr>
+          <p:cNvPr id="18" name="Rectangle 17"/>
+          <p:cNvSpPr/>
+          <p:nvPr/>
+        </p:nvSpPr>
+        <p:spPr>
+          <a:xfrm>
+            <a:off x="502920" y="5157216"/>
+            <a:ext cx="2331720" cy="804672"/>
+          </a:xfrm>
+          <a:prstGeom prst="rect">
+            <a:avLst/>
+          </a:prstGeom>
+          <a:solidFill>
+            <a:srgbClr val="F2F2F2"/>
+          </a:solidFill>
+          <a:ln>
+            <a:noFill/>
+          </a:ln>
+          <a:effectLst/>
+        </p:spPr>
+        <p:style>
+          <a:lnRef idx="1">
+            <a:schemeClr val="accent1"/>
+          </a:lnRef>
+          <a:fillRef idx="3">
+            <a:schemeClr val="accent1"/>
+          </a:fillRef>
+          <a:effectRef idx="2">
+            <a:schemeClr val="accent1"/>
+          </a:effectRef>
+          <a:fontRef idx="minor">
+            <a:schemeClr val="lt1"/>
+          </a:fontRef>
+        </p:style>
+        <p:txBody>
+          <a:bodyPr rtlCol="0" anchor="ctr"/>
+          <a:lstStyle/>
+          <a:p>
+            <a:pPr algn="ctr"/>
+          </a:p>
+        </p:txBody>
+      </p:sp>
+      <p:sp>
+        <p:nvSpPr>
+          <p:cNvPr id="19" name="TextBox 18"/>
+          <p:cNvSpPr txBox="1"/>
+          <p:nvPr/>
+        </p:nvSpPr>
+        <p:spPr>
+          <a:xfrm>
+            <a:off x="640080" y="5340096"/>
+            <a:ext cx="2103120" cy="502920"/>
+          </a:xfrm>
+          <a:prstGeom prst="rect">
+            <a:avLst/>
+          </a:prstGeom>
+          <a:noFill/>
+        </p:spPr>
+        <p:txBody>
+          <a:bodyPr wrap="square">
+            <a:spAutoFit/>
+          </a:bodyPr>
+          <a:lstStyle/>
+          <a:p>
+            <a:pPr>
+              <a:spcBef>
+                <a:spcPts val="0"/>
+              </a:spcBef>
+              <a:spcAft>
+                <a:spcPts val="300"/>
+              </a:spcAft>
+            </a:pPr>
+            <a:r>
+              <a:rPr sz="1250" b="1">
+                <a:solidFill>
+                  <a:srgbClr val="1F3A5F"/>
+                </a:solidFill>
+                <a:latin typeface="Calibri"/>
+              </a:rPr>
+              <a:t>5  RESPONSE</a:t>
+            </a:r>
+          </a:p>
+        </p:txBody>
+      </p:sp>
+      <p:sp>
+        <p:nvSpPr>
+          <p:cNvPr id="20" name="TextBox 19"/>
+          <p:cNvSpPr txBox="1"/>
+          <p:nvPr/>
+        </p:nvSpPr>
+        <p:spPr>
+          <a:xfrm>
+            <a:off x="3017520" y="5212079"/>
+            <a:ext cx="8641080" cy="786384"/>
+          </a:xfrm>
+          <a:prstGeom prst="rect">
+            <a:avLst/>
+          </a:prstGeom>
+          <a:noFill/>
+        </p:spPr>
+        <p:txBody>
+          <a:bodyPr wrap="square">
+            <a:spAutoFit/>
+          </a:bodyPr>
+          <a:lstStyle/>
+          <a:p>
+            <a:pPr>
+              <a:spcBef>
+                <a:spcPts val="0"/>
+              </a:spcBef>
+              <a:spcAft>
+                <a:spcPts val="300"/>
+              </a:spcAft>
+            </a:pPr>
+            <a:r>
+              <a:rPr sz="1200" b="0">
+                <a:solidFill>
+                  <a:srgbClr val="222222"/>
+                </a:solidFill>
+                <a:latin typeface="Calibri"/>
+              </a:rPr>
+              <a:t>"RESPOND with one short line of reasoning, then your tool calls."</a:t>
+            </a:r>
+          </a:p>
+        </p:txBody>
+      </p:sp>
+      <p:sp>
+        <p:nvSpPr>
+          <p:cNvPr id="21" name="TextBox 20"/>
+          <p:cNvSpPr txBox="1"/>
+          <p:nvPr/>
+        </p:nvSpPr>
+        <p:spPr>
+          <a:xfrm>
+            <a:off x="502920" y="5989320"/>
+            <a:ext cx="11201400" cy="566928"/>
+          </a:xfrm>
+          <a:prstGeom prst="rect">
+            <a:avLst/>
+          </a:prstGeom>
+          <a:noFill/>
+        </p:spPr>
+        <p:txBody>
+          <a:bodyPr wrap="square">
+            <a:spAutoFit/>
+          </a:bodyPr>
+          <a:lstStyle/>
+          <a:p>
+            <a:pPr>
+              <a:spcBef>
+                <a:spcPts val="0"/>
+              </a:spcBef>
+              <a:spcAft>
+                <a:spcPts val="300"/>
+              </a:spcAft>
+            </a:pPr>
+            <a:r>
+              <a:rPr sz="1300" b="1">
+                <a:solidFill>
+                  <a:srgbClr val="548235"/>
+                </a:solidFill>
+                <a:latin typeface="Calibri"/>
+              </a:rPr>
+              <a:t>Deliberate omission:  </a:t>
+            </a:r>
+            <a:r>
+              <a:rPr sz="1300" b="0">
+                <a:solidFill>
+                  <a:srgbClr val="222222"/>
+                </a:solidFill>
+                <a:latin typeface="Calibri"/>
+              </a:rPr>
+              <a:t>the prompt never says the Motel's recurring $200/resident/day compounds. Models are told the mechanic and must price it themselves — that is the trap the benchmark measures.</a:t>
+            </a:r>
+          </a:p>
+        </p:txBody>
+      </p:sp>
+    </p:spTree>
+  </p:cSld>
+  <p:clrMapOvr>
+    <a:masterClrMapping/>
+  </p:clrMapOvr>
+</p:sld>
+</file>
+
+<file path=ppt/slides/slide13.xml><?xml version="1.0" encoding="utf-8"?>
+<p:sld xmlns:a="http://schemas.openxmlformats.org/drawingml/2006/main" xmlns:p="http://schemas.openxmlformats.org/presentationml/2006/main" xmlns:r="http://schemas.openxmlformats.org/officeDocument/2006/relationships">
+  <p:cSld>
+    <p:spTree>
+      <p:nvGrpSpPr>
+        <p:cNvPr id="1" name=""/>
+        <p:cNvGrpSpPr/>
+        <p:nvPr/>
+      </p:nvGrpSpPr>
+      <p:grpSpPr/>
+      <p:sp>
+        <p:nvSpPr>
+          <p:cNvPr id="2" name="Rectangle 1"/>
+          <p:cNvSpPr/>
+          <p:nvPr/>
+        </p:nvSpPr>
+        <p:spPr>
+          <a:xfrm>
+            <a:off x="0" y="0"/>
+            <a:ext cx="12188952" cy="1051560"/>
+          </a:xfrm>
+          <a:prstGeom prst="rect">
+            <a:avLst/>
+          </a:prstGeom>
+          <a:solidFill>
+            <a:srgbClr val="1F3A5F"/>
+          </a:solidFill>
+          <a:ln>
+            <a:noFill/>
+          </a:ln>
+          <a:effectLst/>
+        </p:spPr>
+        <p:style>
+          <a:lnRef idx="1">
+            <a:schemeClr val="accent1"/>
+          </a:lnRef>
+          <a:fillRef idx="3">
+            <a:schemeClr val="accent1"/>
+          </a:fillRef>
+          <a:effectRef idx="2">
+            <a:schemeClr val="accent1"/>
+          </a:effectRef>
+          <a:fontRef idx="minor">
+            <a:schemeClr val="lt1"/>
+          </a:fontRef>
+        </p:style>
+        <p:txBody>
+          <a:bodyPr rtlCol="0" anchor="ctr"/>
+          <a:lstStyle/>
+          <a:p>
+            <a:pPr algn="ctr"/>
+          </a:p>
+        </p:txBody>
+      </p:sp>
+      <p:sp>
+        <p:nvSpPr>
+          <p:cNvPr id="3" name="Rectangle 2"/>
+          <p:cNvSpPr/>
+          <p:nvPr/>
+        </p:nvSpPr>
+        <p:spPr>
+          <a:xfrm>
+            <a:off x="0" y="1051560"/>
+            <a:ext cx="12188952" cy="54864"/>
+          </a:xfrm>
+          <a:prstGeom prst="rect">
+            <a:avLst/>
+          </a:prstGeom>
+          <a:solidFill>
+            <a:srgbClr val="2E75B6"/>
+          </a:solidFill>
+          <a:ln>
+            <a:noFill/>
+          </a:ln>
+          <a:effectLst/>
+        </p:spPr>
+        <p:style>
+          <a:lnRef idx="1">
+            <a:schemeClr val="accent1"/>
+          </a:lnRef>
+          <a:fillRef idx="3">
+            <a:schemeClr val="accent1"/>
+          </a:fillRef>
+          <a:effectRef idx="2">
+            <a:schemeClr val="accent1"/>
+          </a:effectRef>
+          <a:fontRef idx="minor">
+            <a:schemeClr val="lt1"/>
+          </a:fontRef>
+        </p:style>
+        <p:txBody>
+          <a:bodyPr rtlCol="0" anchor="ctr"/>
+          <a:lstStyle/>
+          <a:p>
+            <a:pPr algn="ctr"/>
+          </a:p>
+        </p:txBody>
+      </p:sp>
+      <p:sp>
+        <p:nvSpPr>
+          <p:cNvPr id="4" name="TextBox 3"/>
+          <p:cNvSpPr txBox="1"/>
+          <p:nvPr/>
+        </p:nvSpPr>
+        <p:spPr>
+          <a:xfrm>
+            <a:off x="502920" y="146304"/>
+            <a:ext cx="11247120" cy="777240"/>
+          </a:xfrm>
+          <a:prstGeom prst="rect">
+            <a:avLst/>
+          </a:prstGeom>
+          <a:noFill/>
+        </p:spPr>
+        <p:txBody>
+          <a:bodyPr wrap="square">
+            <a:spAutoFit/>
+          </a:bodyPr>
+          <a:lstStyle/>
+          <a:p>
+            <a:pPr>
+              <a:spcBef>
+                <a:spcPts val="0"/>
+              </a:spcBef>
+              <a:spcAft>
+                <a:spcPts val="300"/>
+              </a:spcAft>
+            </a:pPr>
+            <a:r>
+              <a:rPr sz="3000" b="1">
+                <a:solidFill>
+                  <a:srgbClr val="FFFFFF"/>
+                </a:solidFill>
+                <a:latin typeface="Calibri"/>
+              </a:rPr>
+              <a:t>What it sees each turn</a:t>
+            </a:r>
+          </a:p>
+        </p:txBody>
+      </p:sp>
+      <p:sp>
+        <p:nvSpPr>
+          <p:cNvPr id="5" name="TextBox 4"/>
+          <p:cNvSpPr txBox="1"/>
+          <p:nvPr/>
+        </p:nvSpPr>
+        <p:spPr>
+          <a:xfrm>
+            <a:off x="502920" y="1152144"/>
+            <a:ext cx="11338560" cy="384048"/>
+          </a:xfrm>
+          <a:prstGeom prst="rect">
+            <a:avLst/>
+          </a:prstGeom>
+          <a:noFill/>
+        </p:spPr>
+        <p:txBody>
+          <a:bodyPr wrap="square">
+            <a:spAutoFit/>
+          </a:bodyPr>
+          <a:lstStyle/>
+          <a:p>
+            <a:pPr>
+              <a:spcBef>
+                <a:spcPts val="0"/>
+              </a:spcBef>
+              <a:spcAft>
+                <a:spcPts val="300"/>
+              </a:spcAft>
+            </a:pPr>
+            <a:r>
+              <a:rPr sz="1300" b="1">
+                <a:solidFill>
+                  <a:srgbClr val="595959"/>
+                </a:solidFill>
+                <a:latin typeface="Calibri"/>
+              </a:rPr>
+              <a:t>A compact text render of the live state — not JSON. ~62% fewer tokens, same actionable content.</a:t>
+            </a:r>
+          </a:p>
+        </p:txBody>
+      </p:sp>
+      <p:sp>
+        <p:nvSpPr>
+          <p:cNvPr id="6" name="Rectangle 5"/>
+          <p:cNvSpPr/>
+          <p:nvPr/>
+        </p:nvSpPr>
+        <p:spPr>
+          <a:xfrm>
+            <a:off x="502920" y="1645920"/>
+            <a:ext cx="6720840" cy="4160520"/>
+          </a:xfrm>
+          <a:prstGeom prst="rect">
+            <a:avLst/>
+          </a:prstGeom>
+          <a:solidFill>
+            <a:srgbClr val="1F3A5F"/>
+          </a:solidFill>
+          <a:ln>
+            <a:noFill/>
+          </a:ln>
+          <a:effectLst/>
+        </p:spPr>
+        <p:style>
+          <a:lnRef idx="1">
+            <a:schemeClr val="accent1"/>
+          </a:lnRef>
+          <a:fillRef idx="3">
+            <a:schemeClr val="accent1"/>
+          </a:fillRef>
+          <a:effectRef idx="2">
+            <a:schemeClr val="accent1"/>
+          </a:effectRef>
+          <a:fontRef idx="minor">
+            <a:schemeClr val="lt1"/>
+          </a:fontRef>
+        </p:style>
+        <p:txBody>
+          <a:bodyPr rtlCol="0" anchor="ctr"/>
+          <a:lstStyle/>
+          <a:p>
+            <a:pPr algn="ctr"/>
+          </a:p>
+        </p:txBody>
+      </p:sp>
+      <p:sp>
+        <p:nvSpPr>
+          <p:cNvPr id="7" name="TextBox 6"/>
+          <p:cNvSpPr txBox="1"/>
+          <p:nvPr/>
+        </p:nvSpPr>
+        <p:spPr>
+          <a:xfrm>
+            <a:off x="658368" y="1755648"/>
+            <a:ext cx="6409944" cy="3941063"/>
+          </a:xfrm>
+          <a:prstGeom prst="rect">
+            <a:avLst/>
+          </a:prstGeom>
+          <a:noFill/>
+        </p:spPr>
+        <p:txBody>
+          <a:bodyPr wrap="square">
+            <a:spAutoFit/>
+          </a:bodyPr>
+          <a:lstStyle/>
+          <a:p>
+            <a:pPr>
+              <a:spcBef>
+                <a:spcPts val="0"/>
+              </a:spcBef>
+              <a:spcAft>
+                <a:spcPts val="100"/>
+              </a:spcAft>
+            </a:pPr>
+            <a:r>
+              <a:rPr sz="1050" b="0">
+                <a:solidFill>
+                  <a:srgbClr val="FFFFFF"/>
+                </a:solidFill>
+                <a:latin typeface="Consolas"/>
+              </a:rPr>
+              <a:t>day 2 | budget -1000 | satisfaction 50 | roundsLeft 11</a:t>
+            </a:r>
+          </a:p>
+          <a:p>
+            <a:pPr>
+              <a:spcBef>
+                <a:spcPts val="0"/>
+              </a:spcBef>
+              <a:spcAft>
+                <a:spcPts val="100"/>
+              </a:spcAft>
+            </a:pPr>
+            <a:r>
+              <a:rPr sz="1050" b="0">
+                <a:solidFill>
+                  <a:srgbClr val="8ED08E"/>
+                </a:solidFill>
+                <a:latin typeface="Consolas"/>
+              </a:rPr>
+              <a:t>workers: freeTrained 0 freeUntrained 4 working 6 inTraining 0</a:t>
+            </a:r>
+          </a:p>
+          <a:p>
+            <a:pPr>
+              <a:spcBef>
+                <a:spcPts val="0"/>
+              </a:spcBef>
+              <a:spcAft>
+                <a:spcPts val="100"/>
+              </a:spcAft>
+            </a:pPr>
+            <a:r>
+              <a:rPr sz="1050" b="0">
+                <a:solidFill>
+                  <a:srgbClr val="8ED08E"/>
+                </a:solidFill>
+                <a:latin typeface="Consolas"/>
+              </a:rPr>
+              <a:t>logistics: vehiclesFree 3</a:t>
+            </a:r>
+          </a:p>
+          <a:p>
+            <a:pPr>
+              <a:spcBef>
+                <a:spcPts val="0"/>
+              </a:spcBef>
+              <a:spcAft>
+                <a:spcPts val="100"/>
+              </a:spcAft>
+            </a:pPr>
+            <a:r>
+              <a:rPr sz="1050" b="0">
+                <a:solidFill>
+                  <a:srgbClr val="FFFFFF"/>
+                </a:solidFill>
+                <a:latin typeface="Consolas"/>
+              </a:rPr>
+              <a:t>costs: build 2000 hireUntrained 200 hireTrained 1000 train 300</a:t>
+            </a:r>
+          </a:p>
+          <a:p>
+            <a:pPr>
+              <a:spcBef>
+                <a:spcPts val="0"/>
+              </a:spcBef>
+              <a:spcAft>
+                <a:spcPts val="100"/>
+              </a:spcAft>
+            </a:pPr>
+            <a:r>
+              <a:rPr sz="1050" b="0">
+                <a:solidFill>
+                  <a:srgbClr val="8ED08E"/>
+                </a:solidFill>
+                <a:latin typeface="Consolas"/>
+              </a:rPr>
+              <a:t>facilities [name type status workers/need food pop/cap site]:</a:t>
+            </a:r>
+          </a:p>
+          <a:p>
+            <a:pPr>
+              <a:spcBef>
+                <a:spcPts val="0"/>
+              </a:spcBef>
+              <a:spcAft>
+                <a:spcPts val="100"/>
+              </a:spcAft>
+            </a:pPr>
+            <a:r>
+              <a:rPr sz="1050" b="0">
+                <a:solidFill>
+                  <a:srgbClr val="FFFFFF"/>
+                </a:solidFill>
+                <a:latin typeface="Consolas"/>
+              </a:rPr>
+              <a:t>  Kitchen Alpha Kitchen NeedWorker 3/4 0 0/0 0</a:t>
+            </a:r>
+          </a:p>
+          <a:p>
+            <a:pPr>
+              <a:spcBef>
+                <a:spcPts val="0"/>
+              </a:spcBef>
+              <a:spcAft>
+                <a:spcPts val="100"/>
+              </a:spcAft>
+            </a:pPr>
+            <a:r>
+              <a:rPr sz="1050" b="0">
+                <a:solidFill>
+                  <a:srgbClr val="8ED08E"/>
+                </a:solidFill>
+                <a:latin typeface="Consolas"/>
+              </a:rPr>
+              <a:t>  Motel Motel Passive 0/0 0 0/3000 0</a:t>
+            </a:r>
+          </a:p>
+          <a:p>
+            <a:pPr>
+              <a:spcBef>
+                <a:spcPts val="0"/>
+              </a:spcBef>
+              <a:spcAft>
+                <a:spcPts val="100"/>
+              </a:spcAft>
+            </a:pPr>
+            <a:r>
+              <a:rPr sz="1050" b="0">
+                <a:solidFill>
+                  <a:srgbClr val="8ED08E"/>
+                </a:solidFill>
+                <a:latin typeface="Consolas"/>
+              </a:rPr>
+              <a:t>tasks [id type "title" affects (roundsLeft)]:</a:t>
+            </a:r>
+          </a:p>
+          <a:p>
+            <a:pPr>
+              <a:spcBef>
+                <a:spcPts val="0"/>
+              </a:spcBef>
+              <a:spcAft>
+                <a:spcPts val="100"/>
+              </a:spcAft>
+            </a:pPr>
+            <a:r>
+              <a:rPr sz="1050" b="0">
+                <a:solidFill>
+                  <a:srgbClr val="FFFFFF"/>
+                </a:solidFill>
+                <a:latin typeface="Consolas"/>
+              </a:rPr>
+              <a:t>  [FOOD_C01] Demand "Food Request From Community" (2 left)</a:t>
+            </a:r>
+          </a:p>
+          <a:p>
+            <a:pPr>
+              <a:spcBef>
+                <a:spcPts val="0"/>
+              </a:spcBef>
+              <a:spcAft>
+                <a:spcPts val="100"/>
+              </a:spcAft>
+            </a:pPr>
+            <a:r>
+              <a:rPr sz="1050" b="0">
+                <a:solidFill>
+                  <a:srgbClr val="8ED08E"/>
+                </a:solidFill>
+                <a:latin typeface="Consolas"/>
+              </a:rPr>
+              <a:t>    0: Request 100 meals from Kitchens (Quicker delivery)</a:t>
+            </a:r>
+          </a:p>
+          <a:p>
+            <a:pPr>
+              <a:spcBef>
+                <a:spcPts val="0"/>
+              </a:spcBef>
+              <a:spcAft>
+                <a:spcPts val="100"/>
+              </a:spcAft>
+            </a:pPr>
+            <a:r>
+              <a:rPr sz="1050" b="0">
+                <a:solidFill>
+                  <a:srgbClr val="8ED08E"/>
+                </a:solidFill>
+                <a:latin typeface="Consolas"/>
+              </a:rPr>
+              <a:t>    2: Rapid Response deliver 100 meals [Budget -1000]</a:t>
+            </a:r>
+          </a:p>
+          <a:p>
+            <a:pPr>
+              <a:spcBef>
+                <a:spcPts val="0"/>
+              </a:spcBef>
+              <a:spcAft>
+                <a:spcPts val="100"/>
+              </a:spcAft>
+            </a:pPr>
+            <a:r>
+              <a:rPr sz="1050" b="0">
+                <a:solidFill>
+                  <a:srgbClr val="FFFFFF"/>
+                </a:solidFill>
+                <a:latin typeface="Consolas"/>
+              </a:rPr>
+              <a:t>  [RELOC_C02] Demand "Population Relocation" (1 left)</a:t>
+            </a:r>
+          </a:p>
+          <a:p>
+            <a:pPr>
+              <a:spcBef>
+                <a:spcPts val="0"/>
+              </a:spcBef>
+              <a:spcAft>
+                <a:spcPts val="100"/>
+              </a:spcAft>
+            </a:pPr>
+            <a:r>
+              <a:rPr sz="1050" b="0">
+                <a:solidFill>
+                  <a:srgbClr val="8ED08E"/>
+                </a:solidFill>
+                <a:latin typeface="Consolas"/>
+              </a:rPr>
+              <a:t>    0: Send to Shelters      1: Send to Motel</a:t>
+            </a:r>
+          </a:p>
+          <a:p>
+            <a:pPr>
+              <a:spcBef>
+                <a:spcPts val="0"/>
+              </a:spcBef>
+              <a:spcAft>
+                <a:spcPts val="100"/>
+              </a:spcAft>
+            </a:pPr>
+            <a:r>
+              <a:rPr sz="1050" b="0">
+                <a:solidFill>
+                  <a:srgbClr val="8ED08E"/>
+                </a:solidFill>
+                <a:latin typeface="Consolas"/>
+              </a:rPr>
+              <a:t>available:</a:t>
+            </a:r>
+          </a:p>
+          <a:p>
+            <a:pPr>
+              <a:spcBef>
+                <a:spcPts val="0"/>
+              </a:spcBef>
+              <a:spcAft>
+                <a:spcPts val="100"/>
+              </a:spcAft>
+            </a:pPr>
+            <a:r>
+              <a:rPr sz="1050" b="0">
+                <a:solidFill>
+                  <a:srgbClr val="FFFFFF"/>
+                </a:solidFill>
+                <a:latin typeface="Consolas"/>
+              </a:rPr>
+              <a:t>  needStaff: Kitchen Alpha:1   staffNow: Kitchen Alpha:1</a:t>
+            </a:r>
+          </a:p>
+          <a:p>
+            <a:pPr>
+              <a:spcBef>
+                <a:spcPts val="0"/>
+              </a:spcBef>
+              <a:spcAft>
+                <a:spcPts val="100"/>
+              </a:spcAft>
+            </a:pPr>
+            <a:r>
+              <a:rPr sz="1050" b="0">
+                <a:solidFill>
+                  <a:srgbClr val="8ED08E"/>
+                </a:solidFill>
+                <a:latin typeface="Consolas"/>
+              </a:rPr>
+              <a:t>  buildSites: (none)   hire: none</a:t>
+            </a:r>
+          </a:p>
+        </p:txBody>
+      </p:sp>
+      <p:sp>
+        <p:nvSpPr>
+          <p:cNvPr id="8" name="Rectangle 7"/>
+          <p:cNvSpPr/>
+          <p:nvPr/>
+        </p:nvSpPr>
+        <p:spPr>
+          <a:xfrm>
+            <a:off x="7424927" y="1645920"/>
+            <a:ext cx="4261104" cy="987552"/>
+          </a:xfrm>
+          <a:prstGeom prst="rect">
+            <a:avLst/>
+          </a:prstGeom>
+          <a:solidFill>
+            <a:srgbClr val="E8EFE0"/>
+          </a:solidFill>
+          <a:ln>
+            <a:noFill/>
+          </a:ln>
+          <a:effectLst/>
+        </p:spPr>
+        <p:style>
+          <a:lnRef idx="1">
+            <a:schemeClr val="accent1"/>
+          </a:lnRef>
+          <a:fillRef idx="3">
+            <a:schemeClr val="accent1"/>
+          </a:fillRef>
+          <a:effectRef idx="2">
+            <a:schemeClr val="accent1"/>
+          </a:effectRef>
+          <a:fontRef idx="minor">
+            <a:schemeClr val="lt1"/>
+          </a:fontRef>
+        </p:style>
+        <p:txBody>
+          <a:bodyPr rtlCol="0" anchor="ctr"/>
+          <a:lstStyle/>
+          <a:p>
+            <a:pPr algn="ctr"/>
+          </a:p>
+        </p:txBody>
+      </p:sp>
+      <p:sp>
+        <p:nvSpPr>
+          <p:cNvPr id="9" name="TextBox 8"/>
+          <p:cNvSpPr txBox="1"/>
+          <p:nvPr/>
+        </p:nvSpPr>
+        <p:spPr>
+          <a:xfrm>
+            <a:off x="7589520" y="1737360"/>
+            <a:ext cx="3931920" cy="841248"/>
+          </a:xfrm>
+          <a:prstGeom prst="rect">
+            <a:avLst/>
+          </a:prstGeom>
+          <a:noFill/>
+        </p:spPr>
+        <p:txBody>
+          <a:bodyPr wrap="square">
+            <a:spAutoFit/>
+          </a:bodyPr>
+          <a:lstStyle/>
+          <a:p>
+            <a:pPr>
+              <a:spcBef>
+                <a:spcPts val="0"/>
+              </a:spcBef>
+              <a:spcAft>
+                <a:spcPts val="300"/>
+              </a:spcAft>
+            </a:pPr>
+            <a:r>
+              <a:rPr sz="1250" b="1">
+                <a:solidFill>
+                  <a:srgbClr val="548235"/>
+                </a:solidFill>
+                <a:latin typeface="Calibri"/>
+              </a:rPr>
+              <a:t>Stable task tokens</a:t>
+            </a:r>
+          </a:p>
+          <a:p>
+            <a:pPr>
+              <a:spcBef>
+                <a:spcPts val="0"/>
+              </a:spcBef>
+              <a:spcAft>
+                <a:spcPts val="0"/>
+              </a:spcAft>
+            </a:pPr>
+            <a:r>
+              <a:rPr sz="1100" b="0">
+                <a:solidFill>
+                  <a:srgbClr val="222222"/>
+                </a:solidFill>
+                <a:latin typeface="Calibri"/>
+              </a:rPr>
+              <a:t>FOOD_C01, not a drifting integer id — the model can refer to the same task across turns.</a:t>
+            </a:r>
+          </a:p>
+        </p:txBody>
+      </p:sp>
+      <p:sp>
+        <p:nvSpPr>
+          <p:cNvPr id="10" name="Rectangle 9"/>
+          <p:cNvSpPr/>
+          <p:nvPr/>
+        </p:nvSpPr>
+        <p:spPr>
+          <a:xfrm>
+            <a:off x="7424927" y="2706624"/>
+            <a:ext cx="4261104" cy="987552"/>
+          </a:xfrm>
+          <a:prstGeom prst="rect">
+            <a:avLst/>
+          </a:prstGeom>
+          <a:solidFill>
+            <a:srgbClr val="E8EFE0"/>
+          </a:solidFill>
+          <a:ln>
+            <a:noFill/>
+          </a:ln>
+          <a:effectLst/>
+        </p:spPr>
+        <p:style>
+          <a:lnRef idx="1">
+            <a:schemeClr val="accent1"/>
+          </a:lnRef>
+          <a:fillRef idx="3">
+            <a:schemeClr val="accent1"/>
+          </a:fillRef>
+          <a:effectRef idx="2">
+            <a:schemeClr val="accent1"/>
+          </a:effectRef>
+          <a:fontRef idx="minor">
+            <a:schemeClr val="lt1"/>
+          </a:fontRef>
+        </p:style>
+        <p:txBody>
+          <a:bodyPr rtlCol="0" anchor="ctr"/>
+          <a:lstStyle/>
+          <a:p>
+            <a:pPr algn="ctr"/>
+          </a:p>
+        </p:txBody>
+      </p:sp>
+      <p:sp>
+        <p:nvSpPr>
+          <p:cNvPr id="11" name="TextBox 10"/>
+          <p:cNvSpPr txBox="1"/>
+          <p:nvPr/>
+        </p:nvSpPr>
+        <p:spPr>
+          <a:xfrm>
+            <a:off x="7589520" y="2798064"/>
+            <a:ext cx="3931920" cy="841248"/>
+          </a:xfrm>
+          <a:prstGeom prst="rect">
+            <a:avLst/>
+          </a:prstGeom>
+          <a:noFill/>
+        </p:spPr>
+        <p:txBody>
+          <a:bodyPr wrap="square">
+            <a:spAutoFit/>
+          </a:bodyPr>
+          <a:lstStyle/>
+          <a:p>
+            <a:pPr>
+              <a:spcBef>
+                <a:spcPts val="0"/>
+              </a:spcBef>
+              <a:spcAft>
+                <a:spcPts val="300"/>
+              </a:spcAft>
+            </a:pPr>
+            <a:r>
+              <a:rPr sz="1250" b="1">
+                <a:solidFill>
+                  <a:srgbClr val="548235"/>
+                </a:solidFill>
+                <a:latin typeface="Calibri"/>
+              </a:rPr>
+              <a:t>Live costs</a:t>
+            </a:r>
+          </a:p>
+          <a:p>
+            <a:pPr>
+              <a:spcBef>
+                <a:spcPts val="0"/>
+              </a:spcBef>
+              <a:spcAft>
+                <a:spcPts val="0"/>
+              </a:spcAft>
+            </a:pPr>
+            <a:r>
+              <a:rPr sz="1100" b="0">
+                <a:solidFill>
+                  <a:srgbClr val="222222"/>
+                </a:solidFill>
+                <a:latin typeface="Calibri"/>
+              </a:rPr>
+              <a:t>read from the running game, never hard-coded. A stale literal here silently corrupts every budget decision.</a:t>
+            </a:r>
+          </a:p>
+        </p:txBody>
+      </p:sp>
+      <p:sp>
+        <p:nvSpPr>
+          <p:cNvPr id="12" name="Rectangle 11"/>
+          <p:cNvSpPr/>
+          <p:nvPr/>
+        </p:nvSpPr>
+        <p:spPr>
+          <a:xfrm>
+            <a:off x="7424927" y="3767328"/>
+            <a:ext cx="4261104" cy="987552"/>
+          </a:xfrm>
+          <a:prstGeom prst="rect">
+            <a:avLst/>
+          </a:prstGeom>
+          <a:solidFill>
+            <a:srgbClr val="E8EFE0"/>
+          </a:solidFill>
+          <a:ln>
+            <a:noFill/>
+          </a:ln>
+          <a:effectLst/>
+        </p:spPr>
+        <p:style>
+          <a:lnRef idx="1">
+            <a:schemeClr val="accent1"/>
+          </a:lnRef>
+          <a:fillRef idx="3">
+            <a:schemeClr val="accent1"/>
+          </a:fillRef>
+          <a:effectRef idx="2">
+            <a:schemeClr val="accent1"/>
+          </a:effectRef>
+          <a:fontRef idx="minor">
+            <a:schemeClr val="lt1"/>
+          </a:fontRef>
+        </p:style>
+        <p:txBody>
+          <a:bodyPr rtlCol="0" anchor="ctr"/>
+          <a:lstStyle/>
+          <a:p>
+            <a:pPr algn="ctr"/>
+          </a:p>
+        </p:txBody>
+      </p:sp>
+      <p:sp>
+        <p:nvSpPr>
+          <p:cNvPr id="13" name="TextBox 12"/>
+          <p:cNvSpPr txBox="1"/>
+          <p:nvPr/>
+        </p:nvSpPr>
+        <p:spPr>
+          <a:xfrm>
+            <a:off x="7589520" y="3858768"/>
+            <a:ext cx="3931920" cy="841248"/>
+          </a:xfrm>
+          <a:prstGeom prst="rect">
+            <a:avLst/>
+          </a:prstGeom>
+          <a:noFill/>
+        </p:spPr>
+        <p:txBody>
+          <a:bodyPr wrap="square">
+            <a:spAutoFit/>
+          </a:bodyPr>
+          <a:lstStyle/>
+          <a:p>
+            <a:pPr>
+              <a:spcBef>
+                <a:spcPts val="0"/>
+              </a:spcBef>
+              <a:spcAft>
+                <a:spcPts val="300"/>
+              </a:spcAft>
+            </a:pPr>
+            <a:r>
+              <a:rPr sz="1250" b="1">
+                <a:solidFill>
+                  <a:srgbClr val="548235"/>
+                </a:solidFill>
+                <a:latin typeface="Calibri"/>
+              </a:rPr>
+              <a:t>`available` block</a:t>
+            </a:r>
+          </a:p>
+          <a:p>
+            <a:pPr>
+              <a:spcBef>
+                <a:spcPts val="0"/>
+              </a:spcBef>
+              <a:spcAft>
+                <a:spcPts val="0"/>
+              </a:spcAft>
+            </a:pPr>
+            <a:r>
+              <a:rPr sz="1100" b="0">
+                <a:solidFill>
+                  <a:srgbClr val="222222"/>
+                </a:solidFill>
+                <a:latin typeface="Calibri"/>
+              </a:rPr>
+              <a:t>exactly what is executable NOW, derived from the same action set the parser uses — it cannot contradict them.</a:t>
+            </a:r>
+          </a:p>
+        </p:txBody>
+      </p:sp>
+      <p:sp>
+        <p:nvSpPr>
+          <p:cNvPr id="14" name="Rectangle 13"/>
+          <p:cNvSpPr/>
+          <p:nvPr/>
+        </p:nvSpPr>
+        <p:spPr>
+          <a:xfrm>
+            <a:off x="7424927" y="4828032"/>
+            <a:ext cx="4261104" cy="987552"/>
+          </a:xfrm>
+          <a:prstGeom prst="rect">
+            <a:avLst/>
+          </a:prstGeom>
+          <a:solidFill>
+            <a:srgbClr val="E8EFE0"/>
+          </a:solidFill>
+          <a:ln>
+            <a:noFill/>
+          </a:ln>
+          <a:effectLst/>
+        </p:spPr>
+        <p:style>
+          <a:lnRef idx="1">
+            <a:schemeClr val="accent1"/>
+          </a:lnRef>
+          <a:fillRef idx="3">
+            <a:schemeClr val="accent1"/>
+          </a:fillRef>
+          <a:effectRef idx="2">
+            <a:schemeClr val="accent1"/>
+          </a:effectRef>
+          <a:fontRef idx="minor">
+            <a:schemeClr val="lt1"/>
+          </a:fontRef>
+        </p:style>
+        <p:txBody>
+          <a:bodyPr rtlCol="0" anchor="ctr"/>
+          <a:lstStyle/>
+          <a:p>
+            <a:pPr algn="ctr"/>
+          </a:p>
+        </p:txBody>
+      </p:sp>
+      <p:sp>
+        <p:nvSpPr>
+          <p:cNvPr id="15" name="TextBox 14"/>
+          <p:cNvSpPr txBox="1"/>
+          <p:nvPr/>
+        </p:nvSpPr>
+        <p:spPr>
+          <a:xfrm>
+            <a:off x="7589520" y="4919472"/>
+            <a:ext cx="3931920" cy="841248"/>
+          </a:xfrm>
+          <a:prstGeom prst="rect">
+            <a:avLst/>
+          </a:prstGeom>
+          <a:noFill/>
+        </p:spPr>
+        <p:txBody>
+          <a:bodyPr wrap="square">
+            <a:spAutoFit/>
+          </a:bodyPr>
+          <a:lstStyle/>
+          <a:p>
+            <a:pPr>
+              <a:spcBef>
+                <a:spcPts val="0"/>
+              </a:spcBef>
+              <a:spcAft>
+                <a:spcPts val="300"/>
+              </a:spcAft>
+            </a:pPr>
+            <a:r>
+              <a:rPr sz="1250" b="1">
+                <a:solidFill>
+                  <a:srgbClr val="548235"/>
+                </a:solidFill>
+                <a:latin typeface="Calibri"/>
+              </a:rPr>
+              <a:t>Choice impacts</a:t>
+            </a:r>
+          </a:p>
+          <a:p>
+            <a:pPr>
+              <a:spcBef>
+                <a:spcPts val="0"/>
+              </a:spcBef>
+              <a:spcAft>
+                <a:spcPts val="0"/>
+              </a:spcAft>
+            </a:pPr>
+            <a:r>
+              <a:rPr sz="1100" b="0">
+                <a:solidFill>
+                  <a:srgbClr val="222222"/>
+                </a:solidFill>
+                <a:latin typeface="Calibri"/>
+              </a:rPr>
+              <a:t>[Budget -1000] shown inline; the recurring motel cost is deliberately NOT shown on the choice.</a:t>
+            </a:r>
+          </a:p>
+        </p:txBody>
+      </p:sp>
+      <p:sp>
+        <p:nvSpPr>
+          <p:cNvPr id="16" name="TextBox 15"/>
+          <p:cNvSpPr txBox="1"/>
+          <p:nvPr/>
+        </p:nvSpPr>
+        <p:spPr>
+          <a:xfrm>
+            <a:off x="502920" y="5989320"/>
+            <a:ext cx="11201400" cy="566928"/>
+          </a:xfrm>
+          <a:prstGeom prst="rect">
+            <a:avLst/>
+          </a:prstGeom>
+          <a:noFill/>
+        </p:spPr>
+        <p:txBody>
+          <a:bodyPr wrap="square">
+            <a:spAutoFit/>
+          </a:bodyPr>
+          <a:lstStyle/>
+          <a:p>
+            <a:pPr>
+              <a:spcBef>
+                <a:spcPts val="0"/>
+              </a:spcBef>
+              <a:spcAft>
+                <a:spcPts val="300"/>
+              </a:spcAft>
+            </a:pPr>
+            <a:r>
+              <a:rPr sz="1300" b="1">
+                <a:solidFill>
+                  <a:srgbClr val="548235"/>
+                </a:solidFill>
+                <a:latin typeface="Calibri"/>
+              </a:rPr>
+              <a:t>One renderer:  </a:t>
+            </a:r>
+            <a:r>
+              <a:rPr sz="1300" b="0">
+                <a:solidFill>
+                  <a:srgbClr val="222222"/>
+                </a:solidFill>
+                <a:latin typeface="Calibri"/>
+              </a:rPr>
+              <a:t>obs_encoder.render_state_compact() — the benchmark, the live officers and the RL env all call it, so a fix to what the model sees lands in all three at once.</a:t>
+            </a:r>
+          </a:p>
+        </p:txBody>
+      </p:sp>
+    </p:spTree>
+  </p:cSld>
+  <p:clrMapOvr>
+    <a:masterClrMapping/>
+  </p:clrMapOvr>
+</p:sld>
+</file>
+
+<file path=ppt/slides/slide14.xml><?xml version="1.0" encoding="utf-8"?>
+<p:sld xmlns:a="http://schemas.openxmlformats.org/drawingml/2006/main" xmlns:p="http://schemas.openxmlformats.org/presentationml/2006/main" xmlns:r="http://schemas.openxmlformats.org/officeDocument/2006/relationships">
+  <p:cSld>
+    <p:spTree>
+      <p:nvGrpSpPr>
+        <p:cNvPr id="1" name=""/>
+        <p:cNvGrpSpPr/>
+        <p:nvPr/>
+      </p:nvGrpSpPr>
+      <p:grpSpPr/>
+      <p:sp>
+        <p:nvSpPr>
+          <p:cNvPr id="2" name="Rectangle 1"/>
+          <p:cNvSpPr/>
+          <p:nvPr/>
+        </p:nvSpPr>
+        <p:spPr>
+          <a:xfrm>
+            <a:off x="0" y="0"/>
+            <a:ext cx="12188952" cy="1051560"/>
+          </a:xfrm>
+          <a:prstGeom prst="rect">
+            <a:avLst/>
+          </a:prstGeom>
+          <a:solidFill>
+            <a:srgbClr val="1F3A5F"/>
+          </a:solidFill>
+          <a:ln>
+            <a:noFill/>
+          </a:ln>
+          <a:effectLst/>
+        </p:spPr>
+        <p:style>
+          <a:lnRef idx="1">
+            <a:schemeClr val="accent1"/>
+          </a:lnRef>
+          <a:fillRef idx="3">
+            <a:schemeClr val="accent1"/>
+          </a:fillRef>
+          <a:effectRef idx="2">
+            <a:schemeClr val="accent1"/>
+          </a:effectRef>
+          <a:fontRef idx="minor">
+            <a:schemeClr val="lt1"/>
+          </a:fontRef>
+        </p:style>
+        <p:txBody>
+          <a:bodyPr rtlCol="0" anchor="ctr"/>
+          <a:lstStyle/>
+          <a:p>
+            <a:pPr algn="ctr"/>
+          </a:p>
+        </p:txBody>
+      </p:sp>
+      <p:sp>
+        <p:nvSpPr>
+          <p:cNvPr id="3" name="Rectangle 2"/>
+          <p:cNvSpPr/>
+          <p:nvPr/>
+        </p:nvSpPr>
+        <p:spPr>
+          <a:xfrm>
+            <a:off x="0" y="1051560"/>
+            <a:ext cx="12188952" cy="54864"/>
+          </a:xfrm>
+          <a:prstGeom prst="rect">
+            <a:avLst/>
+          </a:prstGeom>
+          <a:solidFill>
+            <a:srgbClr val="2E75B6"/>
+          </a:solidFill>
+          <a:ln>
+            <a:noFill/>
+          </a:ln>
+          <a:effectLst/>
+        </p:spPr>
+        <p:style>
+          <a:lnRef idx="1">
+            <a:schemeClr val="accent1"/>
+          </a:lnRef>
+          <a:fillRef idx="3">
+            <a:schemeClr val="accent1"/>
+          </a:fillRef>
+          <a:effectRef idx="2">
+            <a:schemeClr val="accent1"/>
+          </a:effectRef>
+          <a:fontRef idx="minor">
+            <a:schemeClr val="lt1"/>
+          </a:fontRef>
+        </p:style>
+        <p:txBody>
+          <a:bodyPr rtlCol="0" anchor="ctr"/>
+          <a:lstStyle/>
+          <a:p>
+            <a:pPr algn="ctr"/>
+          </a:p>
+        </p:txBody>
+      </p:sp>
+      <p:sp>
+        <p:nvSpPr>
+          <p:cNvPr id="4" name="TextBox 3"/>
+          <p:cNvSpPr txBox="1"/>
+          <p:nvPr/>
+        </p:nvSpPr>
+        <p:spPr>
+          <a:xfrm>
+            <a:off x="502920" y="146304"/>
+            <a:ext cx="11247120" cy="777240"/>
+          </a:xfrm>
+          <a:prstGeom prst="rect">
+            <a:avLst/>
+          </a:prstGeom>
+          <a:noFill/>
+        </p:spPr>
+        <p:txBody>
+          <a:bodyPr wrap="square">
+            <a:spAutoFit/>
+          </a:bodyPr>
+          <a:lstStyle/>
+          <a:p>
+            <a:pPr>
+              <a:spcBef>
+                <a:spcPts val="0"/>
+              </a:spcBef>
+              <a:spcAft>
+                <a:spcPts val="300"/>
+              </a:spcAft>
+            </a:pPr>
+            <a:r>
+              <a:rPr sz="3000" b="1">
+                <a:solidFill>
+                  <a:srgbClr val="FFFFFF"/>
+                </a:solidFill>
+                <a:latin typeface="Calibri"/>
+              </a:rPr>
+              <a:t>The action space: seven typed tools</a:t>
+            </a:r>
+          </a:p>
+        </p:txBody>
+      </p:sp>
+      <p:sp>
+        <p:nvSpPr>
+          <p:cNvPr id="5" name="TextBox 4"/>
+          <p:cNvSpPr txBox="1"/>
+          <p:nvPr/>
+        </p:nvSpPr>
+        <p:spPr>
+          <a:xfrm>
+            <a:off x="502920" y="1152144"/>
+            <a:ext cx="11338560" cy="384048"/>
+          </a:xfrm>
+          <a:prstGeom prst="rect">
+            <a:avLst/>
+          </a:prstGeom>
+          <a:noFill/>
+        </p:spPr>
+        <p:txBody>
+          <a:bodyPr wrap="square">
+            <a:spAutoFit/>
+          </a:bodyPr>
+          <a:lstStyle/>
+          <a:p>
+            <a:pPr>
+              <a:spcBef>
+                <a:spcPts val="0"/>
+              </a:spcBef>
+              <a:spcAft>
+                <a:spcPts val="300"/>
+              </a:spcAft>
+            </a:pPr>
+            <a:r>
+              <a:rPr sz="1300" b="1">
+                <a:solidFill>
+                  <a:srgbClr val="595959"/>
+                </a:solidFill>
+                <a:latin typeface="Calibri"/>
+              </a:rPr>
+              <a:t>Structured tool calls, not text parsing. The distinction turned out to matter enormously.</a:t>
+            </a:r>
+          </a:p>
+        </p:txBody>
+      </p:sp>
+      <p:sp>
+        <p:nvSpPr>
+          <p:cNvPr id="6" name="Rectangle 5"/>
+          <p:cNvSpPr/>
+          <p:nvPr/>
+        </p:nvSpPr>
+        <p:spPr>
+          <a:xfrm>
+            <a:off x="502920" y="1645920"/>
+            <a:ext cx="5623560" cy="548640"/>
+          </a:xfrm>
+          <a:prstGeom prst="rect">
+            <a:avLst/>
+          </a:prstGeom>
+          <a:solidFill>
+            <a:srgbClr val="F2F2F2"/>
+          </a:solidFill>
+          <a:ln>
+            <a:noFill/>
+          </a:ln>
+          <a:effectLst/>
+        </p:spPr>
+        <p:style>
+          <a:lnRef idx="1">
+            <a:schemeClr val="accent1"/>
+          </a:lnRef>
+          <a:fillRef idx="3">
+            <a:schemeClr val="accent1"/>
+          </a:fillRef>
+          <a:effectRef idx="2">
+            <a:schemeClr val="accent1"/>
+          </a:effectRef>
+          <a:fontRef idx="minor">
+            <a:schemeClr val="lt1"/>
+          </a:fontRef>
+        </p:style>
+        <p:txBody>
+          <a:bodyPr rtlCol="0" anchor="ctr"/>
+          <a:lstStyle/>
+          <a:p>
+            <a:pPr algn="ctr"/>
+          </a:p>
+        </p:txBody>
+      </p:sp>
+      <p:sp>
+        <p:nvSpPr>
+          <p:cNvPr id="7" name="TextBox 6"/>
+          <p:cNvSpPr txBox="1"/>
+          <p:nvPr/>
+        </p:nvSpPr>
+        <p:spPr>
+          <a:xfrm>
+            <a:off x="658368" y="1737360"/>
+            <a:ext cx="5394960" cy="438912"/>
+          </a:xfrm>
+          <a:prstGeom prst="rect">
+            <a:avLst/>
+          </a:prstGeom>
+          <a:noFill/>
+        </p:spPr>
+        <p:txBody>
+          <a:bodyPr wrap="square">
+            <a:spAutoFit/>
+          </a:bodyPr>
+          <a:lstStyle/>
+          <a:p>
+            <a:pPr>
+              <a:spcBef>
+                <a:spcPts val="0"/>
+              </a:spcBef>
+              <a:spcAft>
+                <a:spcPts val="300"/>
+              </a:spcAft>
+            </a:pPr>
+            <a:r>
+              <a:rPr sz="1300" b="1">
+                <a:solidFill>
+                  <a:srgbClr val="1F3A5F"/>
+                </a:solidFill>
+                <a:latin typeface="Calibri"/>
+              </a:rPr>
+              <a:t>build</a:t>
+            </a:r>
+            <a:r>
+              <a:rPr sz="1200" b="0">
+                <a:solidFill>
+                  <a:srgbClr val="222222"/>
+                </a:solidFill>
+                <a:latin typeface="Calibri"/>
+              </a:rPr>
+              <a:t>(type, site_id)   </a:t>
+            </a:r>
+            <a:r>
+              <a:rPr sz="1050" b="0">
+                <a:solidFill>
+                  <a:srgbClr val="595959"/>
+                </a:solidFill>
+                <a:latin typeface="Calibri"/>
+              </a:rPr>
+              <a:t>kitchen | shelter | casework</a:t>
+            </a:r>
+          </a:p>
+        </p:txBody>
+      </p:sp>
+      <p:sp>
+        <p:nvSpPr>
+          <p:cNvPr id="8" name="Rectangle 7"/>
+          <p:cNvSpPr/>
+          <p:nvPr/>
+        </p:nvSpPr>
+        <p:spPr>
+          <a:xfrm>
+            <a:off x="502920" y="2231136"/>
+            <a:ext cx="5623560" cy="548640"/>
+          </a:xfrm>
+          <a:prstGeom prst="rect">
+            <a:avLst/>
+          </a:prstGeom>
+          <a:solidFill>
+            <a:srgbClr val="FFFFFF"/>
+          </a:solidFill>
+          <a:ln>
+            <a:noFill/>
+          </a:ln>
+          <a:effectLst/>
+        </p:spPr>
+        <p:style>
+          <a:lnRef idx="1">
+            <a:schemeClr val="accent1"/>
+          </a:lnRef>
+          <a:fillRef idx="3">
+            <a:schemeClr val="accent1"/>
+          </a:fillRef>
+          <a:effectRef idx="2">
+            <a:schemeClr val="accent1"/>
+          </a:effectRef>
+          <a:fontRef idx="minor">
+            <a:schemeClr val="lt1"/>
+          </a:fontRef>
+        </p:style>
+        <p:txBody>
+          <a:bodyPr rtlCol="0" anchor="ctr"/>
+          <a:lstStyle/>
+          <a:p>
+            <a:pPr algn="ctr"/>
+          </a:p>
+        </p:txBody>
+      </p:sp>
+      <p:sp>
+        <p:nvSpPr>
+          <p:cNvPr id="9" name="TextBox 8"/>
+          <p:cNvSpPr txBox="1"/>
+          <p:nvPr/>
+        </p:nvSpPr>
+        <p:spPr>
+          <a:xfrm>
+            <a:off x="658368" y="2322576"/>
+            <a:ext cx="5394960" cy="438912"/>
+          </a:xfrm>
+          <a:prstGeom prst="rect">
+            <a:avLst/>
+          </a:prstGeom>
+          <a:noFill/>
+        </p:spPr>
+        <p:txBody>
+          <a:bodyPr wrap="square">
+            <a:spAutoFit/>
+          </a:bodyPr>
+          <a:lstStyle/>
+          <a:p>
+            <a:pPr>
+              <a:spcBef>
+                <a:spcPts val="0"/>
+              </a:spcBef>
+              <a:spcAft>
+                <a:spcPts val="300"/>
+              </a:spcAft>
+            </a:pPr>
+            <a:r>
+              <a:rPr sz="1300" b="1">
+                <a:solidFill>
+                  <a:srgbClr val="1F3A5F"/>
+                </a:solidFill>
+                <a:latin typeface="Calibri"/>
+              </a:rPr>
+              <a:t>hire</a:t>
+            </a:r>
+            <a:r>
+              <a:rPr sz="1200" b="0">
+                <a:solidFill>
+                  <a:srgbClr val="222222"/>
+                </a:solidFill>
+                <a:latin typeface="Calibri"/>
+              </a:rPr>
+              <a:t>(kind, count)   </a:t>
+            </a:r>
+            <a:r>
+              <a:rPr sz="1050" b="0">
+                <a:solidFill>
+                  <a:srgbClr val="595959"/>
+                </a:solidFill>
+                <a:latin typeface="Calibri"/>
+              </a:rPr>
+              <a:t>untrained | trained</a:t>
+            </a:r>
+          </a:p>
+        </p:txBody>
+      </p:sp>
+      <p:sp>
+        <p:nvSpPr>
+          <p:cNvPr id="10" name="Rectangle 9"/>
+          <p:cNvSpPr/>
+          <p:nvPr/>
+        </p:nvSpPr>
+        <p:spPr>
+          <a:xfrm>
+            <a:off x="502920" y="2816352"/>
+            <a:ext cx="5623560" cy="548640"/>
+          </a:xfrm>
+          <a:prstGeom prst="rect">
+            <a:avLst/>
+          </a:prstGeom>
+          <a:solidFill>
+            <a:srgbClr val="F2F2F2"/>
+          </a:solidFill>
+          <a:ln>
+            <a:noFill/>
+          </a:ln>
+          <a:effectLst/>
+        </p:spPr>
+        <p:style>
+          <a:lnRef idx="1">
+            <a:schemeClr val="accent1"/>
+          </a:lnRef>
+          <a:fillRef idx="3">
+            <a:schemeClr val="accent1"/>
+          </a:fillRef>
+          <a:effectRef idx="2">
+            <a:schemeClr val="accent1"/>
+          </a:effectRef>
+          <a:fontRef idx="minor">
+            <a:schemeClr val="lt1"/>
+          </a:fontRef>
+        </p:style>
+        <p:txBody>
+          <a:bodyPr rtlCol="0" anchor="ctr"/>
+          <a:lstStyle/>
+          <a:p>
+            <a:pPr algn="ctr"/>
+          </a:p>
+        </p:txBody>
+      </p:sp>
+      <p:sp>
+        <p:nvSpPr>
+          <p:cNvPr id="11" name="TextBox 10"/>
+          <p:cNvSpPr txBox="1"/>
+          <p:nvPr/>
+        </p:nvSpPr>
+        <p:spPr>
+          <a:xfrm>
+            <a:off x="658368" y="2907792"/>
+            <a:ext cx="5394960" cy="438912"/>
+          </a:xfrm>
+          <a:prstGeom prst="rect">
+            <a:avLst/>
+          </a:prstGeom>
+          <a:noFill/>
+        </p:spPr>
+        <p:txBody>
+          <a:bodyPr wrap="square">
+            <a:spAutoFit/>
+          </a:bodyPr>
+          <a:lstStyle/>
+          <a:p>
+            <a:pPr>
+              <a:spcBef>
+                <a:spcPts val="0"/>
+              </a:spcBef>
+              <a:spcAft>
+                <a:spcPts val="300"/>
+              </a:spcAft>
+            </a:pPr>
+            <a:r>
+              <a:rPr sz="1300" b="1">
+                <a:solidFill>
+                  <a:srgbClr val="1F3A5F"/>
+                </a:solidFill>
+                <a:latin typeface="Calibri"/>
+              </a:rPr>
+              <a:t>train</a:t>
+            </a:r>
+            <a:r>
+              <a:rPr sz="1200" b="0">
+                <a:solidFill>
+                  <a:srgbClr val="222222"/>
+                </a:solidFill>
+                <a:latin typeface="Calibri"/>
+              </a:rPr>
+              <a:t>(count)   </a:t>
+            </a:r>
+            <a:r>
+              <a:rPr sz="1050" b="0">
+                <a:solidFill>
+                  <a:srgbClr val="595959"/>
+                </a:solidFill>
+                <a:latin typeface="Calibri"/>
+              </a:rPr>
+              <a:t>promote untrained → trained</a:t>
+            </a:r>
+          </a:p>
+        </p:txBody>
+      </p:sp>
+      <p:sp>
+        <p:nvSpPr>
+          <p:cNvPr id="12" name="Rectangle 11"/>
+          <p:cNvSpPr/>
+          <p:nvPr/>
+        </p:nvSpPr>
+        <p:spPr>
+          <a:xfrm>
+            <a:off x="502920" y="3401568"/>
+            <a:ext cx="5623560" cy="548640"/>
+          </a:xfrm>
+          <a:prstGeom prst="rect">
+            <a:avLst/>
+          </a:prstGeom>
+          <a:solidFill>
+            <a:srgbClr val="FFFFFF"/>
+          </a:solidFill>
+          <a:ln>
+            <a:noFill/>
+          </a:ln>
+          <a:effectLst/>
+        </p:spPr>
+        <p:style>
+          <a:lnRef idx="1">
+            <a:schemeClr val="accent1"/>
+          </a:lnRef>
+          <a:fillRef idx="3">
+            <a:schemeClr val="accent1"/>
+          </a:fillRef>
+          <a:effectRef idx="2">
+            <a:schemeClr val="accent1"/>
+          </a:effectRef>
+          <a:fontRef idx="minor">
+            <a:schemeClr val="lt1"/>
+          </a:fontRef>
+        </p:style>
+        <p:txBody>
+          <a:bodyPr rtlCol="0" anchor="ctr"/>
+          <a:lstStyle/>
+          <a:p>
+            <a:pPr algn="ctr"/>
+          </a:p>
+        </p:txBody>
+      </p:sp>
+      <p:sp>
+        <p:nvSpPr>
+          <p:cNvPr id="13" name="TextBox 12"/>
+          <p:cNvSpPr txBox="1"/>
+          <p:nvPr/>
+        </p:nvSpPr>
+        <p:spPr>
+          <a:xfrm>
+            <a:off x="658368" y="3493008"/>
+            <a:ext cx="5394960" cy="438912"/>
+          </a:xfrm>
+          <a:prstGeom prst="rect">
+            <a:avLst/>
+          </a:prstGeom>
+          <a:noFill/>
+        </p:spPr>
+        <p:txBody>
+          <a:bodyPr wrap="square">
+            <a:spAutoFit/>
+          </a:bodyPr>
+          <a:lstStyle/>
+          <a:p>
+            <a:pPr>
+              <a:spcBef>
+                <a:spcPts val="0"/>
+              </a:spcBef>
+              <a:spcAft>
+                <a:spcPts val="300"/>
+              </a:spcAft>
+            </a:pPr>
+            <a:r>
+              <a:rPr sz="1300" b="1">
+                <a:solidFill>
+                  <a:srgbClr val="1F3A5F"/>
+                </a:solidFill>
+                <a:latin typeface="Calibri"/>
+              </a:rPr>
+              <a:t>staff</a:t>
+            </a:r>
+            <a:r>
+              <a:rPr sz="1200" b="0">
+                <a:solidFill>
+                  <a:srgbClr val="222222"/>
+                </a:solidFill>
+                <a:latin typeface="Calibri"/>
+              </a:rPr>
+              <a:t>(site, count)   </a:t>
+            </a:r>
+            <a:r>
+              <a:rPr sz="1050" b="0">
+                <a:solidFill>
+                  <a:srgbClr val="595959"/>
+                </a:solidFill>
+                <a:latin typeface="Calibri"/>
+              </a:rPr>
+              <a:t>count is in WORKFORCE UNITS</a:t>
+            </a:r>
+          </a:p>
+        </p:txBody>
+      </p:sp>
+      <p:sp>
+        <p:nvSpPr>
+          <p:cNvPr id="14" name="Rectangle 13"/>
+          <p:cNvSpPr/>
+          <p:nvPr/>
+        </p:nvSpPr>
+        <p:spPr>
+          <a:xfrm>
+            <a:off x="502920" y="3986784"/>
+            <a:ext cx="5623560" cy="548640"/>
+          </a:xfrm>
+          <a:prstGeom prst="rect">
+            <a:avLst/>
+          </a:prstGeom>
+          <a:solidFill>
+            <a:srgbClr val="F2F2F2"/>
+          </a:solidFill>
+          <a:ln>
+            <a:noFill/>
+          </a:ln>
+          <a:effectLst/>
+        </p:spPr>
+        <p:style>
+          <a:lnRef idx="1">
+            <a:schemeClr val="accent1"/>
+          </a:lnRef>
+          <a:fillRef idx="3">
+            <a:schemeClr val="accent1"/>
+          </a:fillRef>
+          <a:effectRef idx="2">
+            <a:schemeClr val="accent1"/>
+          </a:effectRef>
+          <a:fontRef idx="minor">
+            <a:schemeClr val="lt1"/>
+          </a:fontRef>
+        </p:style>
+        <p:txBody>
+          <a:bodyPr rtlCol="0" anchor="ctr"/>
+          <a:lstStyle/>
+          <a:p>
+            <a:pPr algn="ctr"/>
+          </a:p>
+        </p:txBody>
+      </p:sp>
+      <p:sp>
+        <p:nvSpPr>
+          <p:cNvPr id="15" name="TextBox 14"/>
+          <p:cNvSpPr txBox="1"/>
+          <p:nvPr/>
+        </p:nvSpPr>
+        <p:spPr>
+          <a:xfrm>
+            <a:off x="658368" y="4078224"/>
+            <a:ext cx="5394960" cy="438912"/>
+          </a:xfrm>
+          <a:prstGeom prst="rect">
+            <a:avLst/>
+          </a:prstGeom>
+          <a:noFill/>
+        </p:spPr>
+        <p:txBody>
+          <a:bodyPr wrap="square">
+            <a:spAutoFit/>
+          </a:bodyPr>
+          <a:lstStyle/>
+          <a:p>
+            <a:pPr>
+              <a:spcBef>
+                <a:spcPts val="0"/>
+              </a:spcBef>
+              <a:spcAft>
+                <a:spcPts val="300"/>
+              </a:spcAft>
+            </a:pPr>
+            <a:r>
+              <a:rPr sz="1300" b="1">
+                <a:solidFill>
+                  <a:srgbClr val="1F3A5F"/>
+                </a:solidFill>
+                <a:latin typeface="Calibri"/>
+              </a:rPr>
+              <a:t>deconstruct</a:t>
+            </a:r>
+            <a:r>
+              <a:rPr sz="1200" b="0">
+                <a:solidFill>
+                  <a:srgbClr val="222222"/>
+                </a:solidFill>
+                <a:latin typeface="Calibri"/>
+              </a:rPr>
+              <a:t>(site)   </a:t>
+            </a:r>
+            <a:r>
+              <a:rPr sz="1050" b="0">
+                <a:solidFill>
+                  <a:srgbClr val="595959"/>
+                </a:solidFill>
+                <a:latin typeface="Calibri"/>
+              </a:rPr>
+              <a:t>frees the site</a:t>
+            </a:r>
+          </a:p>
+        </p:txBody>
+      </p:sp>
+      <p:sp>
+        <p:nvSpPr>
+          <p:cNvPr id="16" name="Rectangle 15"/>
+          <p:cNvSpPr/>
+          <p:nvPr/>
+        </p:nvSpPr>
+        <p:spPr>
+          <a:xfrm>
+            <a:off x="502920" y="4572000"/>
+            <a:ext cx="5623560" cy="548640"/>
+          </a:xfrm>
+          <a:prstGeom prst="rect">
+            <a:avLst/>
+          </a:prstGeom>
+          <a:solidFill>
+            <a:srgbClr val="FFFFFF"/>
+          </a:solidFill>
+          <a:ln>
+            <a:noFill/>
+          </a:ln>
+          <a:effectLst/>
+        </p:spPr>
+        <p:style>
+          <a:lnRef idx="1">
+            <a:schemeClr val="accent1"/>
+          </a:lnRef>
+          <a:fillRef idx="3">
+            <a:schemeClr val="accent1"/>
+          </a:fillRef>
+          <a:effectRef idx="2">
+            <a:schemeClr val="accent1"/>
+          </a:effectRef>
+          <a:fontRef idx="minor">
+            <a:schemeClr val="lt1"/>
+          </a:fontRef>
+        </p:style>
+        <p:txBody>
+          <a:bodyPr rtlCol="0" anchor="ctr"/>
+          <a:lstStyle/>
+          <a:p>
+            <a:pPr algn="ctr"/>
+          </a:p>
+        </p:txBody>
+      </p:sp>
+      <p:sp>
+        <p:nvSpPr>
+          <p:cNvPr id="17" name="TextBox 16"/>
+          <p:cNvSpPr txBox="1"/>
+          <p:nvPr/>
+        </p:nvSpPr>
+        <p:spPr>
+          <a:xfrm>
+            <a:off x="658368" y="4663440"/>
+            <a:ext cx="5394960" cy="438912"/>
+          </a:xfrm>
+          <a:prstGeom prst="rect">
+            <a:avLst/>
+          </a:prstGeom>
+          <a:noFill/>
+        </p:spPr>
+        <p:txBody>
+          <a:bodyPr wrap="square">
+            <a:spAutoFit/>
+          </a:bodyPr>
+          <a:lstStyle/>
+          <a:p>
+            <a:pPr>
+              <a:spcBef>
+                <a:spcPts val="0"/>
+              </a:spcBef>
+              <a:spcAft>
+                <a:spcPts val="300"/>
+              </a:spcAft>
+            </a:pPr>
+            <a:r>
+              <a:rPr sz="1300" b="1">
+                <a:solidFill>
+                  <a:srgbClr val="1F3A5F"/>
+                </a:solidFill>
+                <a:latin typeface="Calibri"/>
+              </a:rPr>
+              <a:t>task</a:t>
+            </a:r>
+            <a:r>
+              <a:rPr sz="1200" b="0">
+                <a:solidFill>
+                  <a:srgbClr val="222222"/>
+                </a:solidFill>
+                <a:latin typeface="Calibri"/>
+              </a:rPr>
+              <a:t>(task_id, choice_id)   </a:t>
+            </a:r>
+            <a:r>
+              <a:rPr sz="1050" b="0">
+                <a:solidFill>
+                  <a:srgbClr val="595959"/>
+                </a:solidFill>
+                <a:latin typeface="Calibri"/>
+              </a:rPr>
+              <a:t>answer an active task</a:t>
+            </a:r>
+          </a:p>
+        </p:txBody>
+      </p:sp>
+      <p:sp>
+        <p:nvSpPr>
+          <p:cNvPr id="18" name="Rectangle 17"/>
+          <p:cNvSpPr/>
+          <p:nvPr/>
+        </p:nvSpPr>
+        <p:spPr>
+          <a:xfrm>
+            <a:off x="502920" y="5157216"/>
+            <a:ext cx="5623560" cy="548640"/>
+          </a:xfrm>
+          <a:prstGeom prst="rect">
+            <a:avLst/>
+          </a:prstGeom>
+          <a:solidFill>
+            <a:srgbClr val="F2F2F2"/>
+          </a:solidFill>
+          <a:ln>
+            <a:noFill/>
+          </a:ln>
+          <a:effectLst/>
+        </p:spPr>
+        <p:style>
+          <a:lnRef idx="1">
+            <a:schemeClr val="accent1"/>
+          </a:lnRef>
+          <a:fillRef idx="3">
+            <a:schemeClr val="accent1"/>
+          </a:fillRef>
+          <a:effectRef idx="2">
+            <a:schemeClr val="accent1"/>
+          </a:effectRef>
+          <a:fontRef idx="minor">
+            <a:schemeClr val="lt1"/>
+          </a:fontRef>
+        </p:style>
+        <p:txBody>
+          <a:bodyPr rtlCol="0" anchor="ctr"/>
+          <a:lstStyle/>
+          <a:p>
+            <a:pPr algn="ctr"/>
+          </a:p>
+        </p:txBody>
+      </p:sp>
+      <p:sp>
+        <p:nvSpPr>
+          <p:cNvPr id="19" name="TextBox 18"/>
+          <p:cNvSpPr txBox="1"/>
+          <p:nvPr/>
+        </p:nvSpPr>
+        <p:spPr>
+          <a:xfrm>
+            <a:off x="658368" y="5248655"/>
+            <a:ext cx="5394960" cy="438912"/>
+          </a:xfrm>
+          <a:prstGeom prst="rect">
+            <a:avLst/>
+          </a:prstGeom>
+          <a:noFill/>
+        </p:spPr>
+        <p:txBody>
+          <a:bodyPr wrap="square">
+            <a:spAutoFit/>
+          </a:bodyPr>
+          <a:lstStyle/>
+          <a:p>
+            <a:pPr>
+              <a:spcBef>
+                <a:spcPts val="0"/>
+              </a:spcBef>
+              <a:spcAft>
+                <a:spcPts val="300"/>
+              </a:spcAft>
+            </a:pPr>
+            <a:r>
+              <a:rPr sz="1300" b="1">
+                <a:solidFill>
+                  <a:srgbClr val="1F3A5F"/>
+                </a:solidFill>
+                <a:latin typeface="Calibri"/>
+              </a:rPr>
+              <a:t>transfer</a:t>
+            </a:r>
+            <a:r>
+              <a:rPr sz="1200" b="0">
+                <a:solidFill>
+                  <a:srgbClr val="222222"/>
+                </a:solidFill>
+                <a:latin typeface="Calibri"/>
+              </a:rPr>
+              <a:t>(resource, source, dest, qty)   </a:t>
+            </a:r>
+            <a:r>
+              <a:rPr sz="1050" b="0">
+                <a:solidFill>
+                  <a:srgbClr val="595959"/>
+                </a:solidFill>
+                <a:latin typeface="Calibri"/>
+              </a:rPr>
+              <a:t>withheld under task_only</a:t>
+            </a:r>
+          </a:p>
+        </p:txBody>
+      </p:sp>
+      <p:sp>
+        <p:nvSpPr>
+          <p:cNvPr id="20" name="Rectangle 19"/>
+          <p:cNvSpPr/>
+          <p:nvPr/>
+        </p:nvSpPr>
+        <p:spPr>
+          <a:xfrm>
+            <a:off x="6400800" y="1645920"/>
+            <a:ext cx="5285232" cy="2103120"/>
+          </a:xfrm>
+          <a:prstGeom prst="rect">
+            <a:avLst/>
+          </a:prstGeom>
+          <a:solidFill>
+            <a:srgbClr val="E8EFE0"/>
+          </a:solidFill>
+          <a:ln>
+            <a:noFill/>
+          </a:ln>
+          <a:effectLst/>
+        </p:spPr>
+        <p:style>
+          <a:lnRef idx="1">
+            <a:schemeClr val="accent1"/>
+          </a:lnRef>
+          <a:fillRef idx="3">
+            <a:schemeClr val="accent1"/>
+          </a:fillRef>
+          <a:effectRef idx="2">
+            <a:schemeClr val="accent1"/>
+          </a:effectRef>
+          <a:fontRef idx="minor">
+            <a:schemeClr val="lt1"/>
+          </a:fontRef>
+        </p:style>
+        <p:txBody>
+          <a:bodyPr rtlCol="0" anchor="ctr"/>
+          <a:lstStyle/>
+          <a:p>
+            <a:pPr algn="ctr"/>
+          </a:p>
+        </p:txBody>
+      </p:sp>
+      <p:sp>
+        <p:nvSpPr>
+          <p:cNvPr id="21" name="TextBox 20"/>
+          <p:cNvSpPr txBox="1"/>
+          <p:nvPr/>
+        </p:nvSpPr>
+        <p:spPr>
+          <a:xfrm>
+            <a:off x="6583680" y="1755648"/>
+            <a:ext cx="4956048" cy="1920240"/>
+          </a:xfrm>
+          <a:prstGeom prst="rect">
+            <a:avLst/>
+          </a:prstGeom>
+          <a:noFill/>
+        </p:spPr>
+        <p:txBody>
+          <a:bodyPr wrap="square">
+            <a:spAutoFit/>
+          </a:bodyPr>
+          <a:lstStyle/>
+          <a:p>
+            <a:pPr>
+              <a:spcBef>
+                <a:spcPts val="0"/>
+              </a:spcBef>
+              <a:spcAft>
+                <a:spcPts val="300"/>
+              </a:spcAft>
+            </a:pPr>
+            <a:r>
+              <a:rPr sz="1400" b="1">
+                <a:solidFill>
+                  <a:srgbClr val="548235"/>
+                </a:solidFill>
+                <a:latin typeface="Calibri"/>
+              </a:rPr>
+              <a:t>Execution is order-independent</a:t>
+            </a:r>
+          </a:p>
+          <a:p>
+            <a:pPr>
+              <a:spcBef>
+                <a:spcPts val="0"/>
+              </a:spcBef>
+              <a:spcAft>
+                <a:spcPts val="300"/>
+              </a:spcAft>
+            </a:pPr>
+            <a:r>
+              <a:rPr sz="1200" b="0">
+                <a:solidFill>
+                  <a:srgbClr val="222222"/>
+                </a:solidFill>
+                <a:latin typeface="Calibri"/>
+              </a:rPr>
+              <a:t>Calls resolve in a FIXED priority — deconstruct, build, hire, train, staff, transfer — not the order written. So hire-then-staff always works in one turn; staffing what you just built never does.</a:t>
+            </a:r>
+          </a:p>
+        </p:txBody>
+      </p:sp>
+      <p:sp>
+        <p:nvSpPr>
+          <p:cNvPr id="22" name="Rectangle 21"/>
+          <p:cNvSpPr/>
+          <p:nvPr/>
+        </p:nvSpPr>
+        <p:spPr>
+          <a:xfrm>
+            <a:off x="6400800" y="3913632"/>
+            <a:ext cx="5285232" cy="1874519"/>
+          </a:xfrm>
+          <a:prstGeom prst="rect">
+            <a:avLst/>
+          </a:prstGeom>
+          <a:solidFill>
+            <a:srgbClr val="1F3A5F"/>
+          </a:solidFill>
+          <a:ln>
+            <a:noFill/>
+          </a:ln>
+          <a:effectLst/>
+        </p:spPr>
+        <p:style>
+          <a:lnRef idx="1">
+            <a:schemeClr val="accent1"/>
+          </a:lnRef>
+          <a:fillRef idx="3">
+            <a:schemeClr val="accent1"/>
+          </a:fillRef>
+          <a:effectRef idx="2">
+            <a:schemeClr val="accent1"/>
+          </a:effectRef>
+          <a:fontRef idx="minor">
+            <a:schemeClr val="lt1"/>
+          </a:fontRef>
+        </p:style>
+        <p:txBody>
+          <a:bodyPr rtlCol="0" anchor="ctr"/>
+          <a:lstStyle/>
+          <a:p>
+            <a:pPr algn="ctr"/>
+          </a:p>
+        </p:txBody>
+      </p:sp>
+      <p:sp>
+        <p:nvSpPr>
+          <p:cNvPr id="23" name="TextBox 22"/>
+          <p:cNvSpPr txBox="1"/>
+          <p:nvPr/>
+        </p:nvSpPr>
+        <p:spPr>
+          <a:xfrm>
+            <a:off x="6583680" y="4023360"/>
+            <a:ext cx="4956048" cy="1691640"/>
+          </a:xfrm>
+          <a:prstGeom prst="rect">
+            <a:avLst/>
+          </a:prstGeom>
+          <a:noFill/>
+        </p:spPr>
+        <p:txBody>
+          <a:bodyPr wrap="square">
+            <a:spAutoFit/>
+          </a:bodyPr>
+          <a:lstStyle/>
+          <a:p>
+            <a:pPr>
+              <a:spcBef>
+                <a:spcPts val="0"/>
+              </a:spcBef>
+              <a:spcAft>
+                <a:spcPts val="300"/>
+              </a:spcAft>
+            </a:pPr>
+            <a:r>
+              <a:rPr sz="1300" b="1">
+                <a:solidFill>
+                  <a:srgbClr val="FFFFFF"/>
+                </a:solidFill>
+                <a:latin typeface="Calibri"/>
+              </a:rPr>
+              <a:t>Measured: tools vs text-parsing</a:t>
+            </a:r>
+          </a:p>
+          <a:p>
+            <a:pPr>
+              <a:spcBef>
+                <a:spcPts val="0"/>
+              </a:spcBef>
+              <a:spcAft>
+                <a:spcPts val="100"/>
+              </a:spcAft>
+            </a:pPr>
+            <a:r>
+              <a:rPr sz="1100" b="0">
+                <a:solidFill>
+                  <a:srgbClr val="8ED08E"/>
+                </a:solidFill>
+                <a:latin typeface="Consolas"/>
+              </a:rPr>
+              <a:t>same model, same prompt, same states</a:t>
+            </a:r>
+          </a:p>
+          <a:p>
+            <a:pPr>
+              <a:spcBef>
+                <a:spcPts val="0"/>
+              </a:spcBef>
+              <a:spcAft>
+                <a:spcPts val="100"/>
+              </a:spcAft>
+            </a:pPr>
+            <a:r>
+              <a:rPr sz="1100" b="0">
+                <a:solidFill>
+                  <a:srgbClr val="8ED08E"/>
+                </a:solidFill>
+                <a:latin typeface="Consolas"/>
+              </a:rPr>
+              <a:t>cmd (tags scraped from text):  6.96 actions/round</a:t>
+            </a:r>
+          </a:p>
+          <a:p>
+            <a:pPr>
+              <a:spcBef>
+                <a:spcPts val="0"/>
+              </a:spcBef>
+              <a:spcAft>
+                <a:spcPts val="100"/>
+              </a:spcAft>
+            </a:pPr>
+            <a:r>
+              <a:rPr sz="1100" b="0">
+                <a:solidFill>
+                  <a:srgbClr val="8ED08E"/>
+                </a:solidFill>
+                <a:latin typeface="Consolas"/>
+              </a:rPr>
+              <a:t>tools (structured tool_calls):  1.28 actions/round</a:t>
+            </a:r>
+          </a:p>
+          <a:p>
+            <a:pPr>
+              <a:spcBef>
+                <a:spcPts val="400"/>
+              </a:spcBef>
+              <a:spcAft>
+                <a:spcPts val="300"/>
+              </a:spcAft>
+            </a:pPr>
+            <a:r>
+              <a:rPr sz="1150" b="0">
+                <a:solidFill>
+                  <a:srgbClr val="FFFFFF"/>
+                </a:solidFill>
+                <a:latin typeface="Calibri"/>
+              </a:rPr>
+              <a:t>The 6.96 was the harness executing commands the model merely QUOTED while thinking. One round registered 34 actions.</a:t>
+            </a:r>
+          </a:p>
+        </p:txBody>
+      </p:sp>
+      <p:sp>
+        <p:nvSpPr>
+          <p:cNvPr id="24" name="TextBox 23"/>
+          <p:cNvSpPr txBox="1"/>
+          <p:nvPr/>
+        </p:nvSpPr>
+        <p:spPr>
+          <a:xfrm>
+            <a:off x="502920" y="6035040"/>
+            <a:ext cx="11201400" cy="566928"/>
+          </a:xfrm>
+          <a:prstGeom prst="rect">
+            <a:avLst/>
+          </a:prstGeom>
+          <a:noFill/>
+        </p:spPr>
+        <p:txBody>
+          <a:bodyPr wrap="square">
+            <a:spAutoFit/>
+          </a:bodyPr>
+          <a:lstStyle/>
+          <a:p>
+            <a:pPr>
+              <a:spcBef>
+                <a:spcPts val="0"/>
+              </a:spcBef>
+              <a:spcAft>
+                <a:spcPts val="300"/>
+              </a:spcAft>
+            </a:pPr>
+            <a:r>
+              <a:rPr sz="1300" b="1">
+                <a:solidFill>
+                  <a:srgbClr val="548235"/>
+                </a:solidFill>
+                <a:latin typeface="Calibri"/>
+              </a:rPr>
+              <a:t>Consequence:  </a:t>
+            </a:r>
+            <a:r>
+              <a:rPr sz="1300" b="0">
+                <a:solidFill>
+                  <a:srgbClr val="222222"/>
+                </a:solidFill>
+                <a:latin typeface="Calibri"/>
+              </a:rPr>
+              <a:t>tool-calling is now the baseline and no earlier cmd-mode action count is comparable. Command errors fell 18x (2.69 → 0.15 per round).</a:t>
+            </a:r>
+          </a:p>
+        </p:txBody>
+      </p:sp>
+    </p:spTree>
+  </p:cSld>
+  <p:clrMapOvr>
+    <a:masterClrMapping/>
+  </p:clrMapOvr>
+</p:sld>
+</file>
+
+<file path=ppt/slides/slide15.xml><?xml version="1.0" encoding="utf-8"?>
+<p:sld xmlns:a="http://schemas.openxmlformats.org/drawingml/2006/main" xmlns:p="http://schemas.openxmlformats.org/presentationml/2006/main" xmlns:r="http://schemas.openxmlformats.org/officeDocument/2006/relationships">
+  <p:cSld>
+    <p:spTree>
+      <p:nvGrpSpPr>
+        <p:cNvPr id="1" name=""/>
+        <p:cNvGrpSpPr/>
+        <p:nvPr/>
+      </p:nvGrpSpPr>
+      <p:grpSpPr/>
+      <p:sp>
+        <p:nvSpPr>
+          <p:cNvPr id="2" name="Rectangle 1"/>
+          <p:cNvSpPr/>
+          <p:nvPr/>
+        </p:nvSpPr>
+        <p:spPr>
+          <a:xfrm>
+            <a:off x="0" y="0"/>
+            <a:ext cx="12188952" cy="1051560"/>
+          </a:xfrm>
+          <a:prstGeom prst="rect">
+            <a:avLst/>
+          </a:prstGeom>
+          <a:solidFill>
+            <a:srgbClr val="548235"/>
+          </a:solidFill>
+          <a:ln>
+            <a:noFill/>
+          </a:ln>
+          <a:effectLst/>
+        </p:spPr>
+        <p:style>
+          <a:lnRef idx="1">
+            <a:schemeClr val="accent1"/>
+          </a:lnRef>
+          <a:fillRef idx="3">
+            <a:schemeClr val="accent1"/>
+          </a:fillRef>
+          <a:effectRef idx="2">
+            <a:schemeClr val="accent1"/>
+          </a:effectRef>
+          <a:fontRef idx="minor">
+            <a:schemeClr val="lt1"/>
+          </a:fontRef>
+        </p:style>
+        <p:txBody>
+          <a:bodyPr rtlCol="0" anchor="ctr"/>
+          <a:lstStyle/>
+          <a:p>
+            <a:pPr algn="ctr"/>
+          </a:p>
+        </p:txBody>
+      </p:sp>
+      <p:sp>
+        <p:nvSpPr>
+          <p:cNvPr id="3" name="Rectangle 2"/>
+          <p:cNvSpPr/>
+          <p:nvPr/>
+        </p:nvSpPr>
+        <p:spPr>
+          <a:xfrm>
+            <a:off x="0" y="1051560"/>
+            <a:ext cx="12188952" cy="54864"/>
+          </a:xfrm>
+          <a:prstGeom prst="rect">
+            <a:avLst/>
+          </a:prstGeom>
+          <a:solidFill>
+            <a:srgbClr val="2E75B6"/>
+          </a:solidFill>
+          <a:ln>
+            <a:noFill/>
+          </a:ln>
+          <a:effectLst/>
+        </p:spPr>
+        <p:style>
+          <a:lnRef idx="1">
+            <a:schemeClr val="accent1"/>
+          </a:lnRef>
+          <a:fillRef idx="3">
+            <a:schemeClr val="accent1"/>
+          </a:fillRef>
+          <a:effectRef idx="2">
+            <a:schemeClr val="accent1"/>
+          </a:effectRef>
+          <a:fontRef idx="minor">
+            <a:schemeClr val="lt1"/>
+          </a:fontRef>
+        </p:style>
+        <p:txBody>
+          <a:bodyPr rtlCol="0" anchor="ctr"/>
+          <a:lstStyle/>
+          <a:p>
+            <a:pPr algn="ctr"/>
+          </a:p>
+        </p:txBody>
+      </p:sp>
+      <p:sp>
+        <p:nvSpPr>
+          <p:cNvPr id="4" name="TextBox 3"/>
+          <p:cNvSpPr txBox="1"/>
+          <p:nvPr/>
+        </p:nvSpPr>
+        <p:spPr>
+          <a:xfrm>
+            <a:off x="502920" y="146304"/>
+            <a:ext cx="11247120" cy="777240"/>
+          </a:xfrm>
+          <a:prstGeom prst="rect">
+            <a:avLst/>
+          </a:prstGeom>
+          <a:noFill/>
+        </p:spPr>
+        <p:txBody>
+          <a:bodyPr wrap="square">
+            <a:spAutoFit/>
+          </a:bodyPr>
+          <a:lstStyle/>
+          <a:p>
+            <a:pPr>
+              <a:spcBef>
+                <a:spcPts val="0"/>
+              </a:spcBef>
+              <a:spcAft>
+                <a:spcPts val="300"/>
+              </a:spcAft>
+            </a:pPr>
+            <a:r>
+              <a:rPr sz="3000" b="1">
+                <a:solidFill>
+                  <a:srgbClr val="FFFFFF"/>
+                </a:solidFill>
+                <a:latin typeface="Calibri"/>
+              </a:rPr>
+              <a:t>Non-learning baselines: four reference policies</a:t>
+            </a:r>
+          </a:p>
+        </p:txBody>
+      </p:sp>
+      <p:sp>
+        <p:nvSpPr>
+          <p:cNvPr id="5" name="TextBox 4"/>
+          <p:cNvSpPr txBox="1"/>
+          <p:nvPr/>
+        </p:nvSpPr>
+        <p:spPr>
+          <a:xfrm>
+            <a:off x="502920" y="1152144"/>
+            <a:ext cx="11338560" cy="384048"/>
+          </a:xfrm>
+          <a:prstGeom prst="rect">
+            <a:avLst/>
+          </a:prstGeom>
+          <a:noFill/>
+        </p:spPr>
+        <p:txBody>
+          <a:bodyPr wrap="square">
+            <a:spAutoFit/>
+          </a:bodyPr>
+          <a:lstStyle/>
+          <a:p>
+            <a:pPr>
+              <a:spcBef>
+                <a:spcPts val="0"/>
+              </a:spcBef>
+              <a:spcAft>
+                <a:spcPts val="300"/>
+              </a:spcAft>
+            </a:pPr>
+            <a:r>
+              <a:rPr sz="1300" b="1">
+                <a:solidFill>
+                  <a:srgbClr val="595959"/>
+                </a:solidFill>
+                <a:latin typeface="Calibri"/>
+              </a:rPr>
+              <a:t>No learning, no API, no prompt. Each reads env.game_state directly and returns choices + action indices.</a:t>
+            </a:r>
+          </a:p>
+        </p:txBody>
+      </p:sp>
+      <p:sp>
+        <p:nvSpPr>
+          <p:cNvPr id="6" name="Rectangle 5"/>
+          <p:cNvSpPr/>
+          <p:nvPr/>
+        </p:nvSpPr>
+        <p:spPr>
+          <a:xfrm>
+            <a:off x="502920" y="1627632"/>
+            <a:ext cx="11183112" cy="1033271"/>
+          </a:xfrm>
+          <a:prstGeom prst="rect">
+            <a:avLst/>
+          </a:prstGeom>
+          <a:solidFill>
+            <a:srgbClr val="F2F2F2"/>
+          </a:solidFill>
+          <a:ln>
+            <a:noFill/>
+          </a:ln>
+          <a:effectLst/>
+        </p:spPr>
+        <p:style>
+          <a:lnRef idx="1">
+            <a:schemeClr val="accent1"/>
+          </a:lnRef>
+          <a:fillRef idx="3">
+            <a:schemeClr val="accent1"/>
+          </a:fillRef>
+          <a:effectRef idx="2">
+            <a:schemeClr val="accent1"/>
+          </a:effectRef>
+          <a:fontRef idx="minor">
+            <a:schemeClr val="lt1"/>
+          </a:fontRef>
+        </p:style>
+        <p:txBody>
+          <a:bodyPr rtlCol="0" anchor="ctr"/>
+          <a:lstStyle/>
+          <a:p>
+            <a:pPr algn="ctr"/>
+          </a:p>
+        </p:txBody>
+      </p:sp>
+      <p:sp>
+        <p:nvSpPr>
+          <p:cNvPr id="7" name="TextBox 6"/>
+          <p:cNvSpPr txBox="1"/>
+          <p:nvPr/>
+        </p:nvSpPr>
+        <p:spPr>
+          <a:xfrm>
+            <a:off x="685800" y="1709928"/>
+            <a:ext cx="10835640" cy="896112"/>
+          </a:xfrm>
+          <a:prstGeom prst="rect">
+            <a:avLst/>
+          </a:prstGeom>
+          <a:noFill/>
+        </p:spPr>
+        <p:txBody>
+          <a:bodyPr wrap="square">
+            <a:spAutoFit/>
+          </a:bodyPr>
+          <a:lstStyle/>
+          <a:p>
+            <a:pPr>
+              <a:spcBef>
+                <a:spcPts val="0"/>
+              </a:spcBef>
+              <a:spcAft>
+                <a:spcPts val="300"/>
+              </a:spcAft>
+            </a:pPr>
+            <a:r>
+              <a:rPr sz="1450" b="1">
+                <a:solidFill>
+                  <a:srgbClr val="1F3A5F"/>
+                </a:solidFill>
+                <a:latin typeface="Calibri"/>
+              </a:rPr>
+              <a:t>greedy</a:t>
+            </a:r>
+            <a:r>
+              <a:rPr sz="1200" b="1">
+                <a:solidFill>
+                  <a:srgbClr val="595959"/>
+                </a:solidFill>
+                <a:latin typeface="Calibri"/>
+              </a:rPr>
+              <a:t>   myopic, reward-mirrored</a:t>
+            </a:r>
+          </a:p>
+          <a:p>
+            <a:pPr>
+              <a:spcBef>
+                <a:spcPts val="0"/>
+              </a:spcBef>
+              <a:spcAft>
+                <a:spcPts val="0"/>
+              </a:spcAft>
+            </a:pPr>
+            <a:r>
+              <a:rPr sz="1150" b="0">
+                <a:solidFill>
+                  <a:srgbClr val="222222"/>
+                </a:solidFill>
+                <a:latin typeface="Calibri"/>
+              </a:rPr>
+              <a:t>Per task, take the choice maximising a value built from the exposed impacts. Assign free workers to NeedWorker buildings. Deliberately NEVER builds, hires or trains — those cost now and pay later, so a strictly myopic policy skips them. The under-investment is the intended diagnostic.</a:t>
+            </a:r>
+          </a:p>
+        </p:txBody>
+      </p:sp>
+      <p:sp>
+        <p:nvSpPr>
+          <p:cNvPr id="8" name="Rectangle 7"/>
+          <p:cNvSpPr/>
+          <p:nvPr/>
+        </p:nvSpPr>
+        <p:spPr>
+          <a:xfrm>
+            <a:off x="502920" y="2734056"/>
+            <a:ext cx="11183112" cy="1033271"/>
+          </a:xfrm>
+          <a:prstGeom prst="rect">
+            <a:avLst/>
+          </a:prstGeom>
+          <a:solidFill>
+            <a:srgbClr val="F2F2F2"/>
+          </a:solidFill>
+          <a:ln>
+            <a:noFill/>
+          </a:ln>
+          <a:effectLst/>
+        </p:spPr>
+        <p:style>
+          <a:lnRef idx="1">
+            <a:schemeClr val="accent1"/>
+          </a:lnRef>
+          <a:fillRef idx="3">
+            <a:schemeClr val="accent1"/>
+          </a:fillRef>
+          <a:effectRef idx="2">
+            <a:schemeClr val="accent1"/>
+          </a:effectRef>
+          <a:fontRef idx="minor">
+            <a:schemeClr val="lt1"/>
+          </a:fontRef>
+        </p:style>
+        <p:txBody>
+          <a:bodyPr rtlCol="0" anchor="ctr"/>
+          <a:lstStyle/>
+          <a:p>
+            <a:pPr algn="ctr"/>
+          </a:p>
+        </p:txBody>
+      </p:sp>
+      <p:sp>
+        <p:nvSpPr>
+          <p:cNvPr id="9" name="TextBox 8"/>
+          <p:cNvSpPr txBox="1"/>
+          <p:nvPr/>
+        </p:nvSpPr>
+        <p:spPr>
+          <a:xfrm>
+            <a:off x="685800" y="2816352"/>
+            <a:ext cx="10835640" cy="896112"/>
+          </a:xfrm>
+          <a:prstGeom prst="rect">
+            <a:avLst/>
+          </a:prstGeom>
+          <a:noFill/>
+        </p:spPr>
+        <p:txBody>
+          <a:bodyPr wrap="square">
+            <a:spAutoFit/>
+          </a:bodyPr>
+          <a:lstStyle/>
+          <a:p>
+            <a:pPr>
+              <a:spcBef>
+                <a:spcPts val="0"/>
+              </a:spcBef>
+              <a:spcAft>
+                <a:spcPts val="300"/>
+              </a:spcAft>
+            </a:pPr>
+            <a:r>
+              <a:rPr sz="1450" b="1">
+                <a:solidFill>
+                  <a:srgbClr val="1F3A5F"/>
+                </a:solidFill>
+                <a:latin typeface="Calibri"/>
+              </a:rPr>
+              <a:t>build-potential</a:t>
+            </a:r>
+            <a:r>
+              <a:rPr sz="1200" b="1">
+                <a:solidFill>
+                  <a:srgbClr val="595959"/>
+                </a:solidFill>
+                <a:latin typeface="Calibri"/>
+              </a:rPr>
+              <a:t>   adds infrastructure</a:t>
+            </a:r>
+          </a:p>
+          <a:p>
+            <a:pPr>
+              <a:spcBef>
+                <a:spcPts val="0"/>
+              </a:spcBef>
+              <a:spcAft>
+                <a:spcPts val="0"/>
+              </a:spcAft>
+            </a:pPr>
+            <a:r>
+              <a:rPr sz="1150" b="0">
+                <a:solidFill>
+                  <a:srgbClr val="222222"/>
+                </a:solidFill>
+                <a:latin typeface="Calibri"/>
+              </a:rPr>
+              <a:t>Keeps greedy's reliable choices and worker assignments, then ADDS building toward a demand target (shelters / kitchens), paid off via worker-use and capacity. Improves the ACTION half of a turn.</a:t>
+            </a:r>
+          </a:p>
+        </p:txBody>
+      </p:sp>
+      <p:sp>
+        <p:nvSpPr>
+          <p:cNvPr id="10" name="Rectangle 9"/>
+          <p:cNvSpPr/>
+          <p:nvPr/>
+        </p:nvSpPr>
+        <p:spPr>
+          <a:xfrm>
+            <a:off x="502920" y="3840480"/>
+            <a:ext cx="11183112" cy="1033271"/>
+          </a:xfrm>
+          <a:prstGeom prst="rect">
+            <a:avLst/>
+          </a:prstGeom>
+          <a:solidFill>
+            <a:srgbClr val="F2F2F2"/>
+          </a:solidFill>
+          <a:ln>
+            <a:noFill/>
+          </a:ln>
+          <a:effectLst/>
+        </p:spPr>
+        <p:style>
+          <a:lnRef idx="1">
+            <a:schemeClr val="accent1"/>
+          </a:lnRef>
+          <a:fillRef idx="3">
+            <a:schemeClr val="accent1"/>
+          </a:fillRef>
+          <a:effectRef idx="2">
+            <a:schemeClr val="accent1"/>
+          </a:effectRef>
+          <a:fontRef idx="minor">
+            <a:schemeClr val="lt1"/>
+          </a:fontRef>
+        </p:style>
+        <p:txBody>
+          <a:bodyPr rtlCol="0" anchor="ctr"/>
+          <a:lstStyle/>
+          <a:p>
+            <a:pPr algn="ctr"/>
+          </a:p>
+        </p:txBody>
+      </p:sp>
+      <p:sp>
+        <p:nvSpPr>
+          <p:cNvPr id="11" name="TextBox 10"/>
+          <p:cNvSpPr txBox="1"/>
+          <p:nvPr/>
+        </p:nvSpPr>
+        <p:spPr>
+          <a:xfrm>
+            <a:off x="685800" y="3922776"/>
+            <a:ext cx="10835640" cy="896112"/>
+          </a:xfrm>
+          <a:prstGeom prst="rect">
+            <a:avLst/>
+          </a:prstGeom>
+          <a:noFill/>
+        </p:spPr>
+        <p:txBody>
+          <a:bodyPr wrap="square">
+            <a:spAutoFit/>
+          </a:bodyPr>
+          <a:lstStyle/>
+          <a:p>
+            <a:pPr>
+              <a:spcBef>
+                <a:spcPts val="0"/>
+              </a:spcBef>
+              <a:spcAft>
+                <a:spcPts val="300"/>
+              </a:spcAft>
+            </a:pPr>
+            <a:r>
+              <a:rPr sz="1450" b="1">
+                <a:solidFill>
+                  <a:srgbClr val="1F3A5F"/>
+                </a:solidFill>
+                <a:latin typeface="Calibri"/>
+              </a:rPr>
+              <a:t>choice-lookahead</a:t>
+            </a:r>
+            <a:r>
+              <a:rPr sz="1200" b="1">
+                <a:solidFill>
+                  <a:srgbClr val="595959"/>
+                </a:solidFill>
+                <a:latin typeface="Calibri"/>
+              </a:rPr>
+              <a:t>   horizon-priced choices</a:t>
+            </a:r>
+          </a:p>
+          <a:p>
+            <a:pPr>
+              <a:spcBef>
+                <a:spcPts val="0"/>
+              </a:spcBef>
+              <a:spcAft>
+                <a:spcPts val="0"/>
+              </a:spcAft>
+            </a:pPr>
+            <a:r>
+              <a:rPr sz="1150" b="0">
+                <a:solidFill>
+                  <a:srgbClr val="222222"/>
+                </a:solidFill>
+                <a:latin typeface="Calibri"/>
+              </a:rPr>
+              <a:t>Keeps greedy's worker assignments but REPLACES the choices with long-term-value ones that price in the motel's recurring $200/person/day over the remaining horizon. Improves the CHOICE half.</a:t>
+            </a:r>
+          </a:p>
+        </p:txBody>
+      </p:sp>
+      <p:sp>
+        <p:nvSpPr>
+          <p:cNvPr id="12" name="Rectangle 11"/>
+          <p:cNvSpPr/>
+          <p:nvPr/>
+        </p:nvSpPr>
+        <p:spPr>
+          <a:xfrm>
+            <a:off x="502920" y="4946904"/>
+            <a:ext cx="11183112" cy="1033271"/>
+          </a:xfrm>
+          <a:prstGeom prst="rect">
+            <a:avLst/>
+          </a:prstGeom>
+          <a:solidFill>
+            <a:srgbClr val="E8EFE0"/>
+          </a:solidFill>
+          <a:ln>
+            <a:noFill/>
+          </a:ln>
+          <a:effectLst/>
+        </p:spPr>
+        <p:style>
+          <a:lnRef idx="1">
+            <a:schemeClr val="accent1"/>
+          </a:lnRef>
+          <a:fillRef idx="3">
+            <a:schemeClr val="accent1"/>
+          </a:fillRef>
+          <a:effectRef idx="2">
+            <a:schemeClr val="accent1"/>
+          </a:effectRef>
+          <a:fontRef idx="minor">
+            <a:schemeClr val="lt1"/>
+          </a:fontRef>
+        </p:style>
+        <p:txBody>
+          <a:bodyPr rtlCol="0" anchor="ctr"/>
+          <a:lstStyle/>
+          <a:p>
+            <a:pPr algn="ctr"/>
+          </a:p>
+        </p:txBody>
+      </p:sp>
+      <p:sp>
+        <p:nvSpPr>
+          <p:cNvPr id="13" name="TextBox 12"/>
+          <p:cNvSpPr txBox="1"/>
+          <p:nvPr/>
+        </p:nvSpPr>
+        <p:spPr>
+          <a:xfrm>
+            <a:off x="685800" y="5029200"/>
+            <a:ext cx="10835640" cy="896112"/>
+          </a:xfrm>
+          <a:prstGeom prst="rect">
+            <a:avLst/>
+          </a:prstGeom>
+          <a:noFill/>
+        </p:spPr>
+        <p:txBody>
+          <a:bodyPr wrap="square">
+            <a:spAutoFit/>
+          </a:bodyPr>
+          <a:lstStyle/>
+          <a:p>
+            <a:pPr>
+              <a:spcBef>
+                <a:spcPts val="0"/>
+              </a:spcBef>
+              <a:spcAft>
+                <a:spcPts val="300"/>
+              </a:spcAft>
+            </a:pPr>
+            <a:r>
+              <a:rPr sz="1450" b="1">
+                <a:solidFill>
+                  <a:srgbClr val="548235"/>
+                </a:solidFill>
+                <a:latin typeface="Calibri"/>
+              </a:rPr>
+              <a:t>combined</a:t>
+            </a:r>
+            <a:r>
+              <a:rPr sz="1200" b="1">
+                <a:solidFill>
+                  <a:srgbClr val="595959"/>
+                </a:solidFill>
+                <a:latin typeface="Calibri"/>
+              </a:rPr>
+              <a:t>   the union</a:t>
+            </a:r>
+          </a:p>
+          <a:p>
+            <a:pPr>
+              <a:spcBef>
+                <a:spcPts val="0"/>
+              </a:spcBef>
+              <a:spcAft>
+                <a:spcPts val="0"/>
+              </a:spcAft>
+            </a:pPr>
+            <a:r>
+              <a:rPr sz="1150" b="0">
+                <a:solidFill>
+                  <a:srgbClr val="222222"/>
+                </a:solidFill>
+                <a:latin typeface="Calibri"/>
+              </a:rPr>
+              <a:t>Choices from choice-lookahead + actions from build-potential. They improve opposite halves of a turn and neither touches the other's, so the merge is a de-duplicated union — no conflict resolution needed.</a:t>
+            </a:r>
+          </a:p>
+        </p:txBody>
+      </p:sp>
+      <p:sp>
+        <p:nvSpPr>
+          <p:cNvPr id="14" name="TextBox 13"/>
+          <p:cNvSpPr txBox="1"/>
+          <p:nvPr/>
+        </p:nvSpPr>
+        <p:spPr>
+          <a:xfrm>
+            <a:off x="502920" y="5989320"/>
+            <a:ext cx="11201400" cy="566928"/>
+          </a:xfrm>
+          <a:prstGeom prst="rect">
+            <a:avLst/>
+          </a:prstGeom>
+          <a:noFill/>
+        </p:spPr>
+        <p:txBody>
+          <a:bodyPr wrap="square">
+            <a:spAutoFit/>
+          </a:bodyPr>
+          <a:lstStyle/>
+          <a:p>
+            <a:pPr>
+              <a:spcBef>
+                <a:spcPts val="0"/>
+              </a:spcBef>
+              <a:spcAft>
+                <a:spcPts val="300"/>
+              </a:spcAft>
+            </a:pPr>
+            <a:r>
+              <a:rPr sz="1300" b="1">
+                <a:solidFill>
+                  <a:srgbClr val="548235"/>
+                </a:solidFill>
+                <a:latin typeface="Calibri"/>
+              </a:rPr>
+              <a:t>Why baselines at all:  </a:t>
+            </a:r>
+            <a:r>
+              <a:rPr sz="1300" b="0">
+                <a:solidFill>
+                  <a:srgbClr val="222222"/>
+                </a:solidFill>
+                <a:latin typeface="Calibri"/>
+              </a:rPr>
+              <a:t>they bound what is achievable without a model, and they separate "the game is hard" from "the policy is weak". All four reach satisfaction 100 with full food fulfilment.</a:t>
+            </a:r>
+          </a:p>
+        </p:txBody>
+      </p:sp>
+    </p:spTree>
+  </p:cSld>
+  <p:clrMapOvr>
+    <a:masterClrMapping/>
+  </p:clrMapOvr>
+</p:sld>
+</file>
+
+<file path=ppt/slides/slide16.xml><?xml version="1.0" encoding="utf-8"?>
+<p:sld xmlns:a="http://schemas.openxmlformats.org/drawingml/2006/main" xmlns:p="http://schemas.openxmlformats.org/presentationml/2006/main" xmlns:r="http://schemas.openxmlformats.org/officeDocument/2006/relationships">
+  <p:cSld>
+    <p:spTree>
+      <p:nvGrpSpPr>
+        <p:cNvPr id="1" name=""/>
+        <p:cNvGrpSpPr/>
+        <p:nvPr/>
+      </p:nvGrpSpPr>
+      <p:grpSpPr/>
+      <p:sp>
+        <p:nvSpPr>
+          <p:cNvPr id="2" name="Rectangle 1"/>
+          <p:cNvSpPr/>
+          <p:nvPr/>
+        </p:nvSpPr>
+        <p:spPr>
+          <a:xfrm>
+            <a:off x="0" y="0"/>
+            <a:ext cx="12188952" cy="1051560"/>
+          </a:xfrm>
+          <a:prstGeom prst="rect">
+            <a:avLst/>
+          </a:prstGeom>
+          <a:solidFill>
+            <a:srgbClr val="548235"/>
+          </a:solidFill>
+          <a:ln>
+            <a:noFill/>
+          </a:ln>
+          <a:effectLst/>
+        </p:spPr>
+        <p:style>
+          <a:lnRef idx="1">
+            <a:schemeClr val="accent1"/>
+          </a:lnRef>
+          <a:fillRef idx="3">
+            <a:schemeClr val="accent1"/>
+          </a:fillRef>
+          <a:effectRef idx="2">
+            <a:schemeClr val="accent1"/>
+          </a:effectRef>
+          <a:fontRef idx="minor">
+            <a:schemeClr val="lt1"/>
+          </a:fontRef>
+        </p:style>
+        <p:txBody>
+          <a:bodyPr rtlCol="0" anchor="ctr"/>
+          <a:lstStyle/>
+          <a:p>
+            <a:pPr algn="ctr"/>
+          </a:p>
+        </p:txBody>
+      </p:sp>
+      <p:sp>
+        <p:nvSpPr>
+          <p:cNvPr id="3" name="Rectangle 2"/>
+          <p:cNvSpPr/>
+          <p:nvPr/>
+        </p:nvSpPr>
+        <p:spPr>
+          <a:xfrm>
+            <a:off x="0" y="1051560"/>
+            <a:ext cx="12188952" cy="54864"/>
+          </a:xfrm>
+          <a:prstGeom prst="rect">
+            <a:avLst/>
+          </a:prstGeom>
+          <a:solidFill>
+            <a:srgbClr val="2E75B6"/>
+          </a:solidFill>
+          <a:ln>
+            <a:noFill/>
+          </a:ln>
+          <a:effectLst/>
+        </p:spPr>
+        <p:style>
+          <a:lnRef idx="1">
+            <a:schemeClr val="accent1"/>
+          </a:lnRef>
+          <a:fillRef idx="3">
+            <a:schemeClr val="accent1"/>
+          </a:fillRef>
+          <a:effectRef idx="2">
+            <a:schemeClr val="accent1"/>
+          </a:effectRef>
+          <a:fontRef idx="minor">
+            <a:schemeClr val="lt1"/>
+          </a:fontRef>
+        </p:style>
+        <p:txBody>
+          <a:bodyPr rtlCol="0" anchor="ctr"/>
+          <a:lstStyle/>
+          <a:p>
+            <a:pPr algn="ctr"/>
+          </a:p>
+        </p:txBody>
+      </p:sp>
+      <p:sp>
+        <p:nvSpPr>
+          <p:cNvPr id="4" name="TextBox 3"/>
+          <p:cNvSpPr txBox="1"/>
+          <p:nvPr/>
+        </p:nvSpPr>
+        <p:spPr>
+          <a:xfrm>
+            <a:off x="502920" y="146304"/>
+            <a:ext cx="11247120" cy="777240"/>
+          </a:xfrm>
+          <a:prstGeom prst="rect">
+            <a:avLst/>
+          </a:prstGeom>
+          <a:noFill/>
+        </p:spPr>
+        <p:txBody>
+          <a:bodyPr wrap="square">
+            <a:spAutoFit/>
+          </a:bodyPr>
+          <a:lstStyle/>
+          <a:p>
+            <a:pPr>
+              <a:spcBef>
+                <a:spcPts val="0"/>
+              </a:spcBef>
+              <a:spcAft>
+                <a:spcPts val="300"/>
+              </a:spcAft>
+            </a:pPr>
+            <a:r>
+              <a:rPr sz="3000" b="1">
+                <a:solidFill>
+                  <a:srgbClr val="FFFFFF"/>
+                </a:solidFill>
+                <a:latin typeface="Calibri"/>
+              </a:rPr>
+              <a:t>Why combining works: disjoint halves of a turn</a:t>
+            </a:r>
+          </a:p>
+        </p:txBody>
+      </p:sp>
+      <p:sp>
+        <p:nvSpPr>
+          <p:cNvPr id="5" name="TextBox 4"/>
+          <p:cNvSpPr txBox="1"/>
+          <p:nvPr/>
+        </p:nvSpPr>
+        <p:spPr>
+          <a:xfrm>
+            <a:off x="502920" y="1152144"/>
+            <a:ext cx="11338560" cy="384048"/>
+          </a:xfrm>
+          <a:prstGeom prst="rect">
+            <a:avLst/>
+          </a:prstGeom>
+          <a:noFill/>
+        </p:spPr>
+        <p:txBody>
+          <a:bodyPr wrap="square">
+            <a:spAutoFit/>
+          </a:bodyPr>
+          <a:lstStyle/>
+          <a:p>
+            <a:pPr>
+              <a:spcBef>
+                <a:spcPts val="0"/>
+              </a:spcBef>
+              <a:spcAft>
+                <a:spcPts val="300"/>
+              </a:spcAft>
+            </a:pPr>
+            <a:r>
+              <a:rPr sz="1300" b="1">
+                <a:solidFill>
+                  <a:srgbClr val="595959"/>
+                </a:solidFill>
+                <a:latin typeface="Calibri"/>
+              </a:rPr>
+              <a:t>The two rules-based policies each fix what the other leaves alone.</a:t>
+            </a:r>
+          </a:p>
+        </p:txBody>
+      </p:sp>
+      <p:sp>
+        <p:nvSpPr>
+          <p:cNvPr id="6" name="Rectangle 5"/>
+          <p:cNvSpPr/>
+          <p:nvPr/>
+        </p:nvSpPr>
+        <p:spPr>
+          <a:xfrm>
+            <a:off x="502920" y="1691640"/>
+            <a:ext cx="5440680" cy="1874519"/>
+          </a:xfrm>
+          <a:prstGeom prst="rect">
+            <a:avLst/>
+          </a:prstGeom>
+          <a:solidFill>
+            <a:srgbClr val="F2F2F2"/>
+          </a:solidFill>
+          <a:ln>
+            <a:noFill/>
+          </a:ln>
+          <a:effectLst/>
+        </p:spPr>
+        <p:style>
+          <a:lnRef idx="1">
+            <a:schemeClr val="accent1"/>
+          </a:lnRef>
+          <a:fillRef idx="3">
+            <a:schemeClr val="accent1"/>
+          </a:fillRef>
+          <a:effectRef idx="2">
+            <a:schemeClr val="accent1"/>
+          </a:effectRef>
+          <a:fontRef idx="minor">
+            <a:schemeClr val="lt1"/>
+          </a:fontRef>
+        </p:style>
+        <p:txBody>
+          <a:bodyPr rtlCol="0" anchor="ctr"/>
+          <a:lstStyle/>
+          <a:p>
+            <a:pPr algn="ctr"/>
+          </a:p>
+        </p:txBody>
+      </p:sp>
+      <p:sp>
+        <p:nvSpPr>
+          <p:cNvPr id="7" name="TextBox 6"/>
+          <p:cNvSpPr txBox="1"/>
+          <p:nvPr/>
+        </p:nvSpPr>
+        <p:spPr>
+          <a:xfrm>
+            <a:off x="685800" y="1801368"/>
+            <a:ext cx="5120640" cy="1691640"/>
+          </a:xfrm>
+          <a:prstGeom prst="rect">
+            <a:avLst/>
+          </a:prstGeom>
+          <a:noFill/>
+        </p:spPr>
+        <p:txBody>
+          <a:bodyPr wrap="square">
+            <a:spAutoFit/>
+          </a:bodyPr>
+          <a:lstStyle/>
+          <a:p>
+            <a:pPr>
+              <a:spcBef>
+                <a:spcPts val="0"/>
+              </a:spcBef>
+              <a:spcAft>
+                <a:spcPts val="300"/>
+              </a:spcAft>
+            </a:pPr>
+            <a:r>
+              <a:rPr sz="1400" b="1">
+                <a:solidFill>
+                  <a:srgbClr val="1F3A5F"/>
+                </a:solidFill>
+                <a:latin typeface="Calibri"/>
+              </a:rPr>
+              <a:t>A turn has two halves</a:t>
+            </a:r>
+          </a:p>
+          <a:p>
+            <a:pPr>
+              <a:spcBef>
+                <a:spcPts val="0"/>
+              </a:spcBef>
+              <a:spcAft>
+                <a:spcPts val="300"/>
+              </a:spcAft>
+            </a:pPr>
+            <a:r>
+              <a:rPr sz="1200" b="0">
+                <a:solidFill>
+                  <a:srgbClr val="222222"/>
+                </a:solidFill>
+                <a:latin typeface="Calibri"/>
+              </a:rPr>
+              <a:t>CHOICES — answering active tasks (which option for each Demand / Advisory).</a:t>
+            </a:r>
+          </a:p>
+          <a:p>
+            <a:pPr>
+              <a:spcBef>
+                <a:spcPts val="0"/>
+              </a:spcBef>
+              <a:spcAft>
+                <a:spcPts val="300"/>
+              </a:spcAft>
+            </a:pPr>
+            <a:r>
+              <a:rPr sz="1200" b="0">
+                <a:solidFill>
+                  <a:srgbClr val="222222"/>
+                </a:solidFill>
+                <a:latin typeface="Calibri"/>
+              </a:rPr>
+              <a:t>ACTIONS — build / hire / train / staff / transfer.</a:t>
+            </a:r>
+          </a:p>
+        </p:txBody>
+      </p:sp>
+      <p:sp>
+        <p:nvSpPr>
+          <p:cNvPr id="8" name="Rectangle 7"/>
+          <p:cNvSpPr/>
+          <p:nvPr/>
+        </p:nvSpPr>
+        <p:spPr>
+          <a:xfrm>
+            <a:off x="6263640" y="1691640"/>
+            <a:ext cx="5422392" cy="1874519"/>
+          </a:xfrm>
+          <a:prstGeom prst="rect">
+            <a:avLst/>
+          </a:prstGeom>
+          <a:solidFill>
+            <a:srgbClr val="E8EFE0"/>
+          </a:solidFill>
+          <a:ln>
+            <a:noFill/>
+          </a:ln>
+          <a:effectLst/>
+        </p:spPr>
+        <p:style>
+          <a:lnRef idx="1">
+            <a:schemeClr val="accent1"/>
+          </a:lnRef>
+          <a:fillRef idx="3">
+            <a:schemeClr val="accent1"/>
+          </a:fillRef>
+          <a:effectRef idx="2">
+            <a:schemeClr val="accent1"/>
+          </a:effectRef>
+          <a:fontRef idx="minor">
+            <a:schemeClr val="lt1"/>
+          </a:fontRef>
+        </p:style>
+        <p:txBody>
+          <a:bodyPr rtlCol="0" anchor="ctr"/>
+          <a:lstStyle/>
+          <a:p>
+            <a:pPr algn="ctr"/>
+          </a:p>
+        </p:txBody>
+      </p:sp>
+      <p:sp>
+        <p:nvSpPr>
+          <p:cNvPr id="9" name="TextBox 8"/>
+          <p:cNvSpPr txBox="1"/>
+          <p:nvPr/>
+        </p:nvSpPr>
+        <p:spPr>
+          <a:xfrm>
+            <a:off x="6446520" y="1801368"/>
+            <a:ext cx="5102352" cy="1691640"/>
+          </a:xfrm>
+          <a:prstGeom prst="rect">
+            <a:avLst/>
+          </a:prstGeom>
+          <a:noFill/>
+        </p:spPr>
+        <p:txBody>
+          <a:bodyPr wrap="square">
+            <a:spAutoFit/>
+          </a:bodyPr>
+          <a:lstStyle/>
+          <a:p>
+            <a:pPr>
+              <a:spcBef>
+                <a:spcPts val="0"/>
+              </a:spcBef>
+              <a:spcAft>
+                <a:spcPts val="300"/>
+              </a:spcAft>
+            </a:pPr>
+            <a:r>
+              <a:rPr sz="1400" b="1">
+                <a:solidFill>
+                  <a:srgbClr val="548235"/>
+                </a:solidFill>
+                <a:latin typeface="Calibri"/>
+              </a:rPr>
+              <a:t>Each policy improves one half</a:t>
+            </a:r>
+          </a:p>
+          <a:p>
+            <a:pPr>
+              <a:spcBef>
+                <a:spcPts val="0"/>
+              </a:spcBef>
+              <a:spcAft>
+                <a:spcPts val="300"/>
+              </a:spcAft>
+            </a:pPr>
+            <a:r>
+              <a:rPr sz="1200" b="0">
+                <a:solidFill>
+                  <a:srgbClr val="222222"/>
+                </a:solidFill>
+                <a:latin typeface="Calibri"/>
+              </a:rPr>
+              <a:t>choice-lookahead  →  better CHOICES, greedy's actions.</a:t>
+            </a:r>
+          </a:p>
+          <a:p>
+            <a:pPr>
+              <a:spcBef>
+                <a:spcPts val="0"/>
+              </a:spcBef>
+              <a:spcAft>
+                <a:spcPts val="300"/>
+              </a:spcAft>
+            </a:pPr>
+            <a:r>
+              <a:rPr sz="1200" b="0">
+                <a:solidFill>
+                  <a:srgbClr val="222222"/>
+                </a:solidFill>
+                <a:latin typeface="Calibri"/>
+              </a:rPr>
+              <a:t>build-potential    →  better ACTIONS, greedy's choices.</a:t>
+            </a:r>
+          </a:p>
+          <a:p>
+            <a:pPr>
+              <a:spcBef>
+                <a:spcPts val="0"/>
+              </a:spcBef>
+              <a:spcAft>
+                <a:spcPts val="300"/>
+              </a:spcAft>
+            </a:pPr>
+            <a:r>
+              <a:rPr sz="1200" b="1">
+                <a:solidFill>
+                  <a:srgbClr val="548235"/>
+                </a:solidFill>
+                <a:latin typeface="Calibri"/>
+              </a:rPr>
+              <a:t>Neither modifies the other's half ⇒ compose freely.</a:t>
+            </a:r>
+          </a:p>
+        </p:txBody>
+      </p:sp>
+      <p:sp>
+        <p:nvSpPr>
+          <p:cNvPr id="10" name="Rectangle 9"/>
+          <p:cNvSpPr/>
+          <p:nvPr/>
+        </p:nvSpPr>
+        <p:spPr>
+          <a:xfrm>
+            <a:off x="502920" y="3749039"/>
+            <a:ext cx="11183112" cy="1417320"/>
+          </a:xfrm>
+          <a:prstGeom prst="rect">
+            <a:avLst/>
+          </a:prstGeom>
+          <a:solidFill>
+            <a:srgbClr val="1F3A5F"/>
+          </a:solidFill>
+          <a:ln>
+            <a:noFill/>
+          </a:ln>
+          <a:effectLst/>
+        </p:spPr>
+        <p:style>
+          <a:lnRef idx="1">
+            <a:schemeClr val="accent1"/>
+          </a:lnRef>
+          <a:fillRef idx="3">
+            <a:schemeClr val="accent1"/>
+          </a:fillRef>
+          <a:effectRef idx="2">
+            <a:schemeClr val="accent1"/>
+          </a:effectRef>
+          <a:fontRef idx="minor">
+            <a:schemeClr val="lt1"/>
+          </a:fontRef>
+        </p:style>
+        <p:txBody>
+          <a:bodyPr rtlCol="0" anchor="ctr"/>
+          <a:lstStyle/>
+          <a:p>
+            <a:pPr algn="ctr"/>
+          </a:p>
+        </p:txBody>
+      </p:sp>
+      <p:sp>
+        <p:nvSpPr>
+          <p:cNvPr id="11" name="TextBox 10"/>
+          <p:cNvSpPr txBox="1"/>
+          <p:nvPr/>
+        </p:nvSpPr>
+        <p:spPr>
+          <a:xfrm>
+            <a:off x="658368" y="3858768"/>
+            <a:ext cx="10872216" cy="1197864"/>
+          </a:xfrm>
+          <a:prstGeom prst="rect">
+            <a:avLst/>
+          </a:prstGeom>
+          <a:noFill/>
+        </p:spPr>
+        <p:txBody>
+          <a:bodyPr wrap="square">
+            <a:spAutoFit/>
+          </a:bodyPr>
+          <a:lstStyle/>
+          <a:p>
+            <a:pPr>
+              <a:spcBef>
+                <a:spcPts val="0"/>
+              </a:spcBef>
+              <a:spcAft>
+                <a:spcPts val="100"/>
+              </a:spcAft>
+            </a:pPr>
+            <a:r>
+              <a:rPr sz="1050" b="0">
+                <a:solidFill>
+                  <a:srgbClr val="FFFFFF"/>
+                </a:solidFill>
+                <a:latin typeface="Consolas"/>
+              </a:rPr>
+              <a:t>combined(env, round, horizon):</a:t>
+            </a:r>
+          </a:p>
+          <a:p>
+            <a:pPr>
+              <a:spcBef>
+                <a:spcPts val="0"/>
+              </a:spcBef>
+              <a:spcAft>
+                <a:spcPts val="100"/>
+              </a:spcAft>
+            </a:pPr>
+            <a:r>
+              <a:rPr sz="1050" b="0">
+                <a:solidFill>
+                  <a:srgbClr val="8ED08E"/>
+                </a:solidFill>
+                <a:latin typeface="Consolas"/>
+              </a:rPr>
+              <a:t>    choices = choice_lookahead(env, round, horizon)['choices']   # horizon-priced</a:t>
+            </a:r>
+          </a:p>
+          <a:p>
+            <a:pPr>
+              <a:spcBef>
+                <a:spcPts val="0"/>
+              </a:spcBef>
+              <a:spcAft>
+                <a:spcPts val="100"/>
+              </a:spcAft>
+            </a:pPr>
+            <a:r>
+              <a:rPr sz="1050" b="0">
+                <a:solidFill>
+                  <a:srgbClr val="8ED08E"/>
+                </a:solidFill>
+                <a:latin typeface="Consolas"/>
+              </a:rPr>
+              <a:t>    actions = build_potential(env, round, horizon)['actions']    # infrastructure</a:t>
+            </a:r>
+          </a:p>
+          <a:p>
+            <a:pPr>
+              <a:spcBef>
+                <a:spcPts val="0"/>
+              </a:spcBef>
+              <a:spcAft>
+                <a:spcPts val="100"/>
+              </a:spcAft>
+            </a:pPr>
+            <a:r>
+              <a:rPr sz="1050" b="0">
+                <a:solidFill>
+                  <a:srgbClr val="8ED08E"/>
+                </a:solidFill>
+                <a:latin typeface="Consolas"/>
+              </a:rPr>
+              <a:t>    return dedup_union(choices, actions)   # indices into the SAME env.valid_actions</a:t>
+            </a:r>
+          </a:p>
+        </p:txBody>
+      </p:sp>
+      <p:sp>
+        <p:nvSpPr>
+          <p:cNvPr id="12" name="TextBox 11"/>
+          <p:cNvSpPr txBox="1"/>
+          <p:nvPr/>
+        </p:nvSpPr>
+        <p:spPr>
+          <a:xfrm>
+            <a:off x="502920" y="5349240"/>
+            <a:ext cx="11201400" cy="566928"/>
+          </a:xfrm>
+          <a:prstGeom prst="rect">
+            <a:avLst/>
+          </a:prstGeom>
+          <a:noFill/>
+        </p:spPr>
+        <p:txBody>
+          <a:bodyPr wrap="square">
+            <a:spAutoFit/>
+          </a:bodyPr>
+          <a:lstStyle/>
+          <a:p>
+            <a:pPr>
+              <a:spcBef>
+                <a:spcPts val="0"/>
+              </a:spcBef>
+              <a:spcAft>
+                <a:spcPts val="300"/>
+              </a:spcAft>
+            </a:pPr>
+            <a:r>
+              <a:rPr sz="1300" b="1">
+                <a:solidFill>
+                  <a:srgbClr val="BF8F00"/>
+                </a:solidFill>
+                <a:latin typeface="Calibri"/>
+              </a:rPr>
+              <a:t>Caveat for the talk:  </a:t>
+            </a:r>
+            <a:r>
+              <a:rPr sz="1300" b="0">
+                <a:solidFill>
+                  <a:srgbClr val="222222"/>
+                </a:solidFill>
+                <a:latin typeface="Calibri"/>
+              </a:rPr>
+              <a:t>absolute scores predate the worker-cost fix and the prompt unification, so treat the ORDERING as the result and re-measure the numbers before publishing.</a:t>
             </a:r>
           </a:p>
         </p:txBody>
